--- a/docs/flows.pptx
+++ b/docs/flows.pptx
@@ -4,9 +4,6 @@
   <p:sldMasterIdLst>
     <p:sldMasterId id="2147483648" r:id="rId1"/>
   </p:sldMasterIdLst>
-  <p:notesMasterIdLst>
-    <p:notesMasterId r:id="rId12"/>
-  </p:notesMasterIdLst>
   <p:sldIdLst>
     <p:sldId id="256" r:id="rId2"/>
     <p:sldId id="257" r:id="rId3"/>
@@ -19,6 +16,9 @@
     <p:sldId id="264" r:id="rId10"/>
     <p:sldId id="265" r:id="rId11"/>
   </p:sldIdLst>
+  <p:notesMasterIdLst>
+    <p:notesMasterId r:id="rId12"/>
+  </p:notesMasterIdLst>
   <p:sldSz cx="12192000" cy="6858000"/>
   <p:notesSz cx="6858000" cy="12192000"/>
   <p:defaultTextStyle>
@@ -113,11 +113,6 @@
       </a:defRPr>
     </a:lvl9pPr>
   </p:defaultTextStyle>
-  <p:extLst>
-    <p:ext uri="{EFAFB233-063F-42B5-8137-9DF3F51BA10A}">
-      <p15:sldGuideLst xmlns:p15="http://schemas.microsoft.com/office/powerpoint/2012/main"/>
-    </p:ext>
-  </p:extLst>
 </p:presentation>
 </file>
 
@@ -143,17 +138,241 @@
           <a:chExt cx="0" cy="0"/>
         </a:xfrm>
       </p:grpSpPr>
+      <p:sp>
+        <p:nvSpPr>
+          <p:cNvPr id="2" name="Header Placeholder 1"/>
+          <p:cNvSpPr>
+            <a:spLocks noGrp="1"/>
+          </p:cNvSpPr>
+          <p:nvPr>
+            <p:ph type="hdr" sz="quarter"/>
+          </p:nvPr>
+        </p:nvSpPr>
+        <p:spPr>
+          <a:xfrm>
+            <a:off x="0" y="0"/>
+            <a:ext cx="2971800" cy="458788"/>
+          </a:xfrm>
+          <a:prstGeom prst="rect">
+            <a:avLst/>
+          </a:prstGeom>
+        </p:spPr>
+        <p:txBody>
+          <a:bodyPr vert="horz" lIns="91440" tIns="45720" rIns="91440" bIns="45720" rtlCol="0"/>
+          <a:lstStyle>
+            <a:lvl1pPr algn="l">
+              <a:defRPr sz="1200"/>
+            </a:lvl1pPr>
+          </a:lstStyle>
+          <a:p>
+            <a:endParaRPr lang="en-US"/>
+          </a:p>
+        </p:txBody>
+      </p:sp>
+      <p:sp>
+        <p:nvSpPr>
+          <p:cNvPr id="3" name="Date Placeholder 2"/>
+          <p:cNvSpPr>
+            <a:spLocks noGrp="1"/>
+          </p:cNvSpPr>
+          <p:nvPr>
+            <p:ph type="dt" idx="1"/>
+          </p:nvPr>
+        </p:nvSpPr>
+        <p:spPr>
+          <a:xfrm>
+            <a:off x="3884613" y="0"/>
+            <a:ext cx="2971800" cy="458788"/>
+          </a:xfrm>
+          <a:prstGeom prst="rect">
+            <a:avLst/>
+          </a:prstGeom>
+        </p:spPr>
+        <p:txBody>
+          <a:bodyPr vert="horz" lIns="91440" tIns="45720" rIns="91440" bIns="45720" rtlCol="0"/>
+          <a:lstStyle>
+            <a:lvl1pPr algn="r">
+              <a:defRPr sz="1200"/>
+            </a:lvl1pPr>
+          </a:lstStyle>
+          <a:p>
+            <a:fld id="{5282F153-3F37-0F45-9E97-73ACFA13230C}" type="datetimeFigureOut">
+              <a:rPr lang="en-US"/>
+              <a:t>7/23/19</a:t>
+            </a:fld>
+            <a:endParaRPr lang="en-US"/>
+          </a:p>
+        </p:txBody>
+      </p:sp>
+      <p:sp>
+        <p:nvSpPr>
+          <p:cNvPr id="4" name="Slide Image Placeholder 3"/>
+          <p:cNvSpPr>
+            <a:spLocks noGrp="1" noRot="1" noChangeAspect="1"/>
+          </p:cNvSpPr>
+          <p:nvPr>
+            <p:ph type="sldImg" idx="2"/>
+          </p:nvPr>
+        </p:nvSpPr>
+        <p:spPr>
+          <a:xfrm>
+            <a:off x="685800" y="1143000"/>
+            <a:ext cx="5486400" cy="3086100"/>
+          </a:xfrm>
+          <a:prstGeom prst="rect">
+            <a:avLst/>
+          </a:prstGeom>
+          <a:noFill/>
+          <a:ln w="12700">
+            <a:solidFill>
+              <a:prstClr val="black"/>
+            </a:solidFill>
+          </a:ln>
+        </p:spPr>
+        <p:txBody>
+          <a:bodyPr vert="horz" lIns="91440" tIns="45720" rIns="91440" bIns="45720" rtlCol="0" anchor="ctr"/>
+          <a:lstStyle/>
+          <a:p>
+            <a:endParaRPr lang="en-US"/>
+          </a:p>
+        </p:txBody>
+      </p:sp>
+      <p:sp>
+        <p:nvSpPr>
+          <p:cNvPr id="5" name="Notes Placeholder 4"/>
+          <p:cNvSpPr>
+            <a:spLocks noGrp="1"/>
+          </p:cNvSpPr>
+          <p:nvPr>
+            <p:ph type="body" sz="quarter" idx="3"/>
+          </p:nvPr>
+        </p:nvSpPr>
+        <p:spPr>
+          <a:xfrm>
+            <a:off x="685800" y="4400550"/>
+            <a:ext cx="5486400" cy="3600450"/>
+          </a:xfrm>
+          <a:prstGeom prst="rect">
+            <a:avLst/>
+          </a:prstGeom>
+        </p:spPr>
+        <p:txBody>
+          <a:bodyPr vert="horz" lIns="91440" tIns="45720" rIns="91440" bIns="45720" rtlCol="0"/>
+          <a:lstStyle/>
+          <a:p>
+            <a:pPr lvl="0"/>
+            <a:r>
+              <a:rPr lang="en-US"/>
+              <a:t>Click to edit Master text styles</a:t>
+            </a:r>
+          </a:p>
+          <a:p>
+            <a:pPr lvl="1"/>
+            <a:r>
+              <a:rPr lang="en-US"/>
+              <a:t>Second level</a:t>
+            </a:r>
+          </a:p>
+          <a:p>
+            <a:pPr lvl="2"/>
+            <a:r>
+              <a:rPr lang="en-US"/>
+              <a:t>Third level</a:t>
+            </a:r>
+          </a:p>
+          <a:p>
+            <a:pPr lvl="3"/>
+            <a:r>
+              <a:rPr lang="en-US"/>
+              <a:t>Fourth level</a:t>
+            </a:r>
+          </a:p>
+          <a:p>
+            <a:pPr lvl="4"/>
+            <a:r>
+              <a:rPr lang="en-US"/>
+              <a:t>Fifth level</a:t>
+            </a:r>
+          </a:p>
+        </p:txBody>
+      </p:sp>
+      <p:sp>
+        <p:nvSpPr>
+          <p:cNvPr id="6" name="Footer Placeholder 5"/>
+          <p:cNvSpPr>
+            <a:spLocks noGrp="1"/>
+          </p:cNvSpPr>
+          <p:nvPr>
+            <p:ph type="ftr" sz="quarter" idx="4"/>
+          </p:nvPr>
+        </p:nvSpPr>
+        <p:spPr>
+          <a:xfrm>
+            <a:off x="0" y="8685213"/>
+            <a:ext cx="2971800" cy="458787"/>
+          </a:xfrm>
+          <a:prstGeom prst="rect">
+            <a:avLst/>
+          </a:prstGeom>
+        </p:spPr>
+        <p:txBody>
+          <a:bodyPr vert="horz" lIns="91440" tIns="45720" rIns="91440" bIns="45720" rtlCol="0" anchor="b"/>
+          <a:lstStyle>
+            <a:lvl1pPr algn="l">
+              <a:defRPr sz="1200"/>
+            </a:lvl1pPr>
+          </a:lstStyle>
+          <a:p>
+            <a:endParaRPr lang="en-US"/>
+          </a:p>
+        </p:txBody>
+      </p:sp>
+      <p:sp>
+        <p:nvSpPr>
+          <p:cNvPr id="7" name="Slide Number Placeholder 6"/>
+          <p:cNvSpPr>
+            <a:spLocks noGrp="1"/>
+          </p:cNvSpPr>
+          <p:nvPr>
+            <p:ph type="sldNum" sz="quarter" idx="5"/>
+          </p:nvPr>
+        </p:nvSpPr>
+        <p:spPr>
+          <a:xfrm>
+            <a:off x="3884613" y="8685213"/>
+            <a:ext cx="2971800" cy="458787"/>
+          </a:xfrm>
+          <a:prstGeom prst="rect">
+            <a:avLst/>
+          </a:prstGeom>
+        </p:spPr>
+        <p:txBody>
+          <a:bodyPr vert="horz" lIns="91440" tIns="45720" rIns="91440" bIns="45720" rtlCol="0" anchor="b"/>
+          <a:lstStyle>
+            <a:lvl1pPr algn="r">
+              <a:defRPr sz="1200"/>
+            </a:lvl1pPr>
+          </a:lstStyle>
+          <a:p>
+            <a:fld id="{CE5E9CC1-C706-0F49-92D6-E571CC5EEA8F}" type="slidenum">
+              <a:rPr lang="en-US"/>
+              <a:t>‹#›</a:t>
+            </a:fld>
+            <a:endParaRPr lang="en-US"/>
+          </a:p>
+        </p:txBody>
+      </p:sp>
     </p:spTree>
     <p:extLst>
       <p:ext uri="{BB962C8B-B14F-4D97-AF65-F5344CB8AC3E}">
-        <p14:creationId xmlns:p14="http://schemas.microsoft.com/office/powerpoint/2010/main" val="1375071663"/>
+        <p14:creationId xmlns:p14="http://schemas.microsoft.com/office/powerpoint/2010/main" val="1024086991"/>
       </p:ext>
     </p:extLst>
   </p:cSld>
   <p:clrMap bg1="lt1" tx1="dk1" bg2="lt2" tx2="dk2" accent1="accent1" accent2="accent2" accent3="accent3" accent4="accent4" accent5="accent5" accent6="accent6" hlink="hlink" folHlink="folHlink"/>
   <p:notesStyle>
     <a:lvl1pPr marL="0" algn="l" defTabSz="914400" rtl="0" eaLnBrk="1" latinLnBrk="0" hangingPunct="1">
-      <a:defRPr kumimoji="1" sz="1200" kern="1200">
+      <a:defRPr sz="1200" kern="1200">
         <a:solidFill>
           <a:schemeClr val="tx1"/>
         </a:solidFill>
@@ -163,7 +382,7 @@
       </a:defRPr>
     </a:lvl1pPr>
     <a:lvl2pPr marL="457200" algn="l" defTabSz="914400" rtl="0" eaLnBrk="1" latinLnBrk="0" hangingPunct="1">
-      <a:defRPr kumimoji="1" sz="1200" kern="1200">
+      <a:defRPr sz="1200" kern="1200">
         <a:solidFill>
           <a:schemeClr val="tx1"/>
         </a:solidFill>
@@ -173,7 +392,7 @@
       </a:defRPr>
     </a:lvl2pPr>
     <a:lvl3pPr marL="914400" algn="l" defTabSz="914400" rtl="0" eaLnBrk="1" latinLnBrk="0" hangingPunct="1">
-      <a:defRPr kumimoji="1" sz="1200" kern="1200">
+      <a:defRPr sz="1200" kern="1200">
         <a:solidFill>
           <a:schemeClr val="tx1"/>
         </a:solidFill>
@@ -183,7 +402,7 @@
       </a:defRPr>
     </a:lvl3pPr>
     <a:lvl4pPr marL="1371600" algn="l" defTabSz="914400" rtl="0" eaLnBrk="1" latinLnBrk="0" hangingPunct="1">
-      <a:defRPr kumimoji="1" sz="1200" kern="1200">
+      <a:defRPr sz="1200" kern="1200">
         <a:solidFill>
           <a:schemeClr val="tx1"/>
         </a:solidFill>
@@ -193,7 +412,7 @@
       </a:defRPr>
     </a:lvl4pPr>
     <a:lvl5pPr marL="1828800" algn="l" defTabSz="914400" rtl="0" eaLnBrk="1" latinLnBrk="0" hangingPunct="1">
-      <a:defRPr kumimoji="1" sz="1200" kern="1200">
+      <a:defRPr sz="1200" kern="1200">
         <a:solidFill>
           <a:schemeClr val="tx1"/>
         </a:solidFill>
@@ -203,7 +422,7 @@
       </a:defRPr>
     </a:lvl5pPr>
     <a:lvl6pPr marL="2286000" algn="l" defTabSz="914400" rtl="0" eaLnBrk="1" latinLnBrk="0" hangingPunct="1">
-      <a:defRPr kumimoji="1" sz="1200" kern="1200">
+      <a:defRPr sz="1200" kern="1200">
         <a:solidFill>
           <a:schemeClr val="tx1"/>
         </a:solidFill>
@@ -213,7 +432,7 @@
       </a:defRPr>
     </a:lvl6pPr>
     <a:lvl7pPr marL="2743200" algn="l" defTabSz="914400" rtl="0" eaLnBrk="1" latinLnBrk="0" hangingPunct="1">
-      <a:defRPr kumimoji="1" sz="1200" kern="1200">
+      <a:defRPr sz="1200" kern="1200">
         <a:solidFill>
           <a:schemeClr val="tx1"/>
         </a:solidFill>
@@ -223,7 +442,7 @@
       </a:defRPr>
     </a:lvl7pPr>
     <a:lvl8pPr marL="3200400" algn="l" defTabSz="914400" rtl="0" eaLnBrk="1" latinLnBrk="0" hangingPunct="1">
-      <a:defRPr kumimoji="1" sz="1200" kern="1200">
+      <a:defRPr sz="1200" kern="1200">
         <a:solidFill>
           <a:schemeClr val="tx1"/>
         </a:solidFill>
@@ -233,7 +452,7 @@
       </a:defRPr>
     </a:lvl8pPr>
     <a:lvl9pPr marL="3657600" algn="l" defTabSz="914400" rtl="0" eaLnBrk="1" latinLnBrk="0" hangingPunct="1">
-      <a:defRPr kumimoji="1" sz="1200" kern="1200">
+      <a:defRPr sz="1200" kern="1200">
         <a:solidFill>
           <a:schemeClr val="tx1"/>
         </a:solidFill>
@@ -290,6 +509,10 @@
           <a:bodyPr/>
           <a:lstStyle/>
           <a:p>
+            <a:r>
+              <a:rPr lang="en-US" dirty="0"/>
+              <a:t/>
+            </a:r>
             <a:endParaRPr lang="en-US" dirty="0"/>
           </a:p>
         </p:txBody>
@@ -374,6 +597,10 @@
           <a:bodyPr/>
           <a:lstStyle/>
           <a:p>
+            <a:r>
+              <a:rPr lang="en-US" dirty="0"/>
+              <a:t/>
+            </a:r>
             <a:endParaRPr lang="en-US" dirty="0"/>
           </a:p>
         </p:txBody>
@@ -458,6 +685,10 @@
           <a:bodyPr/>
           <a:lstStyle/>
           <a:p>
+            <a:r>
+              <a:rPr lang="en-US" dirty="0"/>
+              <a:t/>
+            </a:r>
             <a:endParaRPr lang="en-US" dirty="0"/>
           </a:p>
         </p:txBody>
@@ -542,6 +773,10 @@
           <a:bodyPr/>
           <a:lstStyle/>
           <a:p>
+            <a:r>
+              <a:rPr lang="en-US" dirty="0"/>
+              <a:t/>
+            </a:r>
             <a:endParaRPr lang="en-US" dirty="0"/>
           </a:p>
         </p:txBody>
@@ -626,6 +861,10 @@
           <a:bodyPr/>
           <a:lstStyle/>
           <a:p>
+            <a:r>
+              <a:rPr lang="en-US" dirty="0"/>
+              <a:t/>
+            </a:r>
             <a:endParaRPr lang="en-US" dirty="0"/>
           </a:p>
         </p:txBody>
@@ -710,6 +949,10 @@
           <a:bodyPr/>
           <a:lstStyle/>
           <a:p>
+            <a:r>
+              <a:rPr lang="en-US" dirty="0"/>
+              <a:t/>
+            </a:r>
             <a:endParaRPr lang="en-US" dirty="0"/>
           </a:p>
         </p:txBody>
@@ -794,6 +1037,10 @@
           <a:bodyPr/>
           <a:lstStyle/>
           <a:p>
+            <a:r>
+              <a:rPr lang="en-US" dirty="0"/>
+              <a:t/>
+            </a:r>
             <a:endParaRPr lang="en-US" dirty="0"/>
           </a:p>
         </p:txBody>
@@ -878,6 +1125,10 @@
           <a:bodyPr/>
           <a:lstStyle/>
           <a:p>
+            <a:r>
+              <a:rPr lang="en-US" dirty="0"/>
+              <a:t/>
+            </a:r>
             <a:endParaRPr lang="en-US" dirty="0"/>
           </a:p>
         </p:txBody>
@@ -962,6 +1213,10 @@
           <a:bodyPr/>
           <a:lstStyle/>
           <a:p>
+            <a:r>
+              <a:rPr lang="en-US" dirty="0"/>
+              <a:t/>
+            </a:r>
             <a:endParaRPr lang="en-US" dirty="0"/>
           </a:p>
         </p:txBody>
@@ -1046,6 +1301,10 @@
           <a:bodyPr/>
           <a:lstStyle/>
           <a:p>
+            <a:r>
+              <a:rPr lang="en-US" dirty="0"/>
+              <a:t/>
+            </a:r>
             <a:endParaRPr lang="en-US" dirty="0"/>
           </a:p>
         </p:txBody>
@@ -1119,11 +1378,6 @@
 <file path=ppt/slideMasters/slideMaster1.xml><?xml version="1.0" encoding="utf-8"?>
 <p:sldMaster xmlns:a="http://schemas.openxmlformats.org/drawingml/2006/main" xmlns:r="http://schemas.openxmlformats.org/officeDocument/2006/relationships" xmlns:p="http://schemas.openxmlformats.org/presentationml/2006/main">
   <p:cSld>
-    <p:bg>
-      <p:bgRef idx="1001">
-        <a:schemeClr val="bg1"/>
-      </p:bgRef>
-    </p:bg>
     <p:spTree>
       <p:nvGrpSpPr>
         <p:cNvPr id="1" name=""/>
@@ -1406,7 +1660,6 @@
         <a:solidFill>
           <a:srgbClr val="1E2761"/>
         </a:solidFill>
-        <a:effectLst/>
       </p:bgPr>
     </p:bg>
     <p:spTree>
@@ -1469,7 +1722,7 @@
           <a:bodyPr wrap="square" lIns="0" tIns="0" rIns="0" bIns="0" rtlCol="0" anchor="ctr"/>
           <a:lstStyle/>
           <a:p>
-            <a:pPr marL="0" indent="0">
+            <a:pPr indent="0" marL="0">
               <a:buNone/>
             </a:pPr>
             <a:r>
@@ -1508,7 +1761,7 @@
           <a:bodyPr wrap="square" lIns="0" tIns="0" rIns="0" bIns="0" rtlCol="0" anchor="ctr"/>
           <a:lstStyle/>
           <a:p>
-            <a:pPr marL="0" indent="0">
+            <a:pPr indent="0" marL="0">
               <a:buNone/>
             </a:pPr>
             <a:r>
@@ -1547,7 +1800,7 @@
           <a:bodyPr wrap="square" lIns="0" tIns="0" rIns="0" bIns="0" rtlCol="0" anchor="ctr"/>
           <a:lstStyle/>
           <a:p>
-            <a:pPr marL="0" indent="0">
+            <a:pPr indent="0" marL="0">
               <a:buNone/>
             </a:pPr>
             <a:r>
@@ -1586,7 +1839,7 @@
           <a:bodyPr wrap="square" lIns="0" tIns="0" rIns="0" bIns="0" rtlCol="0" anchor="ctr"/>
           <a:lstStyle/>
           <a:p>
-            <a:pPr marL="0" indent="0">
+            <a:pPr indent="0" marL="0">
               <a:buNone/>
             </a:pPr>
             <a:r>
@@ -1620,7 +1873,6 @@
         <a:solidFill>
           <a:srgbClr val="1E2761"/>
         </a:solidFill>
-        <a:effectLst/>
       </p:bgPr>
     </p:bg>
     <p:spTree>
@@ -1658,7 +1910,7 @@
           <a:bodyPr wrap="square" lIns="0" tIns="0" rIns="0" bIns="0" rtlCol="0" anchor="ctr"/>
           <a:lstStyle/>
           <a:p>
-            <a:pPr marL="0" indent="0">
+            <a:pPr indent="0" marL="0">
               <a:buNone/>
             </a:pPr>
             <a:r>
@@ -1747,7 +1999,7 @@
           <a:bodyPr wrap="square" lIns="0" tIns="0" rIns="0" bIns="0" rtlCol="0" anchor="ctr"/>
           <a:lstStyle/>
           <a:p>
-            <a:pPr marL="0" indent="0">
+            <a:pPr indent="0" marL="0">
               <a:buNone/>
             </a:pPr>
             <a:r>
@@ -1786,7 +2038,7 @@
           <a:bodyPr wrap="square" lIns="0" tIns="0" rIns="0" bIns="0" rtlCol="0" anchor="t"/>
           <a:lstStyle/>
           <a:p>
-            <a:pPr marL="0" indent="0">
+            <a:pPr indent="0" marL="0">
               <a:buNone/>
             </a:pPr>
             <a:r>
@@ -1803,7 +2055,7 @@
             <a:endParaRPr lang="en-US" sz="1000" dirty="0"/>
           </a:p>
           <a:p>
-            <a:pPr marL="0" indent="0">
+            <a:pPr indent="0" marL="0">
               <a:buNone/>
             </a:pPr>
             <a:r>
@@ -1892,7 +2144,7 @@
           <a:bodyPr wrap="square" lIns="0" tIns="0" rIns="0" bIns="0" rtlCol="0" anchor="ctr"/>
           <a:lstStyle/>
           <a:p>
-            <a:pPr marL="0" indent="0">
+            <a:pPr indent="0" marL="0">
               <a:buNone/>
             </a:pPr>
             <a:r>
@@ -1931,7 +2183,7 @@
           <a:bodyPr wrap="square" lIns="0" tIns="0" rIns="0" bIns="0" rtlCol="0" anchor="t"/>
           <a:lstStyle/>
           <a:p>
-            <a:pPr marL="0" indent="0">
+            <a:pPr indent="0" marL="0">
               <a:buNone/>
             </a:pPr>
             <a:r>
@@ -1943,7 +2195,7 @@
                 <a:ea typeface="Calibri" pitchFamily="34" charset="-122"/>
                 <a:cs typeface="Calibri" pitchFamily="34" charset="-120"/>
               </a:rPr>
-              <a:t>cross-scene 中に旧/新 Scene の Loader が同じ singleton プロパティを購読しても衝突しない仕組み (NavigationTable.sceneOf で自シーン判定)。</a:t>
+              <a:t>cross-scene 中に旧/新 Scene の Loader が同じ singleton プロパティを購読しても衝突しない仕組み (ViewId.sceneOf で自シーン判定)。</a:t>
             </a:r>
             <a:endParaRPr lang="en-US" sz="1000" dirty="0"/>
           </a:p>
@@ -2020,7 +2272,7 @@
           <a:bodyPr wrap="square" lIns="0" tIns="0" rIns="0" bIns="0" rtlCol="0" anchor="ctr"/>
           <a:lstStyle/>
           <a:p>
-            <a:pPr marL="0" indent="0">
+            <a:pPr indent="0" marL="0">
               <a:buNone/>
             </a:pPr>
             <a:r>
@@ -2059,7 +2311,7 @@
           <a:bodyPr wrap="square" lIns="0" tIns="0" rIns="0" bIns="0" rtlCol="0" anchor="t"/>
           <a:lstStyle/>
           <a:p>
-            <a:pPr marL="0" indent="0">
+            <a:pPr indent="0" marL="0">
               <a:buNone/>
             </a:pPr>
             <a:r>
@@ -2148,7 +2400,7 @@
           <a:bodyPr wrap="square" lIns="0" tIns="0" rIns="0" bIns="0" rtlCol="0" anchor="ctr"/>
           <a:lstStyle/>
           <a:p>
-            <a:pPr marL="0" indent="0">
+            <a:pPr indent="0" marL="0">
               <a:buNone/>
             </a:pPr>
             <a:r>
@@ -2160,7 +2412,7 @@
                 <a:ea typeface="Calibri" pitchFamily="34" charset="-122"/>
                 <a:cs typeface="Calibri" pitchFamily="34" charset="-120"/>
               </a:rPr>
-              <a:t>整数 ID (bit-packed)</a:t>
+              <a:t>整数 ID (bit-packed) + enum</a:t>
             </a:r>
             <a:endParaRPr lang="en-US" sz="1300" dirty="0"/>
           </a:p>
@@ -2187,7 +2439,7 @@
           <a:bodyPr wrap="square" lIns="0" tIns="0" rIns="0" bIns="0" rtlCol="0" anchor="t"/>
           <a:lstStyle/>
           <a:p>
-            <a:pPr marL="0" indent="0">
+            <a:pPr indent="0" marL="0">
               <a:buNone/>
             </a:pPr>
             <a:r>
@@ -2199,7 +2451,7 @@
                 <a:ea typeface="Calibri" pitchFamily="34" charset="-122"/>
                 <a:cs typeface="Calibri" pitchFamily="34" charset="-120"/>
               </a:rPr>
-              <a:t>viewId は ((sceneId &lt;&lt; 8) | localId) の int。比較が高速、メモリ効率良し。文字列名は Logger.nameOf() でログ可読化のみに使用。</a:t>
+              <a:t>viewId は ((sceneId &lt;&lt; 8) | localId) の int。SceneId / ViewId 単独の enum singleton 内で定義 (QUL 2.9 の enum 構文)。文字列名は ViewId.nameOf() でログ可読化のみに使用。</a:t>
             </a:r>
             <a:endParaRPr lang="en-US" sz="1000" dirty="0"/>
           </a:p>
@@ -2276,7 +2528,7 @@
           <a:bodyPr wrap="square" lIns="0" tIns="0" rIns="0" bIns="0" rtlCol="0" anchor="ctr"/>
           <a:lstStyle/>
           <a:p>
-            <a:pPr marL="0" indent="0">
+            <a:pPr indent="0" marL="0">
               <a:buNone/>
             </a:pPr>
             <a:r>
@@ -2315,7 +2567,7 @@
           <a:bodyPr wrap="square" lIns="0" tIns="0" rIns="0" bIns="0" rtlCol="0" anchor="t"/>
           <a:lstStyle/>
           <a:p>
-            <a:pPr marL="0" indent="0">
+            <a:pPr indent="0" marL="0">
               <a:buNone/>
             </a:pPr>
             <a:r>
@@ -2404,7 +2656,7 @@
           <a:bodyPr wrap="square" lIns="0" tIns="0" rIns="0" bIns="0" rtlCol="0" anchor="ctr"/>
           <a:lstStyle/>
           <a:p>
-            <a:pPr marL="0" indent="0">
+            <a:pPr indent="0" marL="0">
               <a:buNone/>
             </a:pPr>
             <a:r>
@@ -2443,7 +2695,7 @@
           <a:bodyPr wrap="square" lIns="0" tIns="0" rIns="0" bIns="0" rtlCol="0" anchor="t"/>
           <a:lstStyle/>
           <a:p>
-            <a:pPr marL="0" indent="0">
+            <a:pPr indent="0" marL="0">
               <a:buNone/>
             </a:pPr>
             <a:r>
@@ -2482,7 +2734,7 @@
           <a:bodyPr wrap="square" lIns="0" tIns="0" rIns="0" bIns="0" rtlCol="0" anchor="ctr"/>
           <a:lstStyle/>
           <a:p>
-            <a:pPr marL="0" indent="0" algn="ctr">
+            <a:pPr algn="ctr" indent="0" marL="0">
               <a:buNone/>
             </a:pPr>
             <a:r>
@@ -2516,7 +2768,6 @@
         <a:solidFill>
           <a:srgbClr val="FFFFFF"/>
         </a:solidFill>
-        <a:effectLst/>
       </p:bgPr>
     </p:bg>
     <p:spTree>
@@ -2554,7 +2805,7 @@
           <a:bodyPr wrap="square" lIns="0" tIns="0" rIns="0" bIns="0" rtlCol="0" anchor="ctr"/>
           <a:lstStyle/>
           <a:p>
-            <a:pPr marL="0" indent="0">
+            <a:pPr indent="0" marL="0">
               <a:buNone/>
             </a:pPr>
             <a:r>
@@ -2593,7 +2844,7 @@
           <a:bodyPr wrap="square" lIns="0" tIns="0" rIns="0" bIns="0" rtlCol="0" anchor="ctr"/>
           <a:lstStyle/>
           <a:p>
-            <a:pPr marL="0" indent="0">
+            <a:pPr indent="0" marL="0">
               <a:buNone/>
             </a:pPr>
             <a:r>
@@ -2682,7 +2933,7 @@
           <a:bodyPr wrap="square" lIns="0" tIns="0" rIns="0" bIns="0" rtlCol="0" anchor="ctr"/>
           <a:lstStyle/>
           <a:p>
-            <a:pPr marL="0" indent="0">
+            <a:pPr indent="0" marL="0">
               <a:buNone/>
             </a:pPr>
             <a:r>
@@ -2694,7 +2945,7 @@
                 <a:ea typeface="Calibri" pitchFamily="34" charset="-122"/>
                 <a:cs typeface="Calibri" pitchFamily="34" charset="-120"/>
               </a:rPr>
-              <a:t>NavigationTable</a:t>
+              <a:t>SceneId / ViewId</a:t>
             </a:r>
             <a:endParaRPr lang="en-US" sz="1200" dirty="0"/>
           </a:p>
@@ -2721,7 +2972,7 @@
           <a:bodyPr wrap="square" lIns="0" tIns="0" rIns="0" bIns="0" rtlCol="0" anchor="t"/>
           <a:lstStyle/>
           <a:p>
-            <a:pPr marL="0" indent="0">
+            <a:pPr indent="0" marL="0">
               <a:buNone/>
             </a:pPr>
             <a:r>
@@ -2733,24 +2984,7 @@
                 <a:ea typeface="Calibri" pitchFamily="34" charset="-122"/>
                 <a:cs typeface="Calibri" pitchFamily="34" charset="-120"/>
               </a:rPr>
-              <a:t>ID 解決</a:t>
-            </a:r>
-            <a:endParaRPr lang="en-US" sz="1000" dirty="0"/>
-          </a:p>
-          <a:p>
-            <a:pPr marL="0" indent="0">
-              <a:buNone/>
-            </a:pPr>
-            <a:r>
-              <a:rPr lang="en-US" sz="1000" dirty="0">
-                <a:solidFill>
-                  <a:srgbClr val="1A1A1A"/>
-                </a:solidFill>
-                <a:latin typeface="Calibri" pitchFamily="34" charset="0"/>
-                <a:ea typeface="Calibri" pitchFamily="34" charset="-122"/>
-                <a:cs typeface="Calibri" pitchFamily="34" charset="-120"/>
-              </a:rPr>
-              <a:t>(整数 enum, ファイル名 lookup)</a:t>
+              <a:t>ID enum + ファイル名/表示名 helper</a:t>
             </a:r>
             <a:endParaRPr lang="en-US" sz="1000" dirty="0"/>
           </a:p>
@@ -2827,7 +3061,7 @@
           <a:bodyPr wrap="square" lIns="0" tIns="0" rIns="0" bIns="0" rtlCol="0" anchor="ctr"/>
           <a:lstStyle/>
           <a:p>
-            <a:pPr marL="0" indent="0">
+            <a:pPr indent="0" marL="0">
               <a:buNone/>
             </a:pPr>
             <a:r>
@@ -2866,7 +3100,7 @@
           <a:bodyPr wrap="square" lIns="0" tIns="0" rIns="0" bIns="0" rtlCol="0" anchor="t"/>
           <a:lstStyle/>
           <a:p>
-            <a:pPr marL="0" indent="0">
+            <a:pPr indent="0" marL="0">
               <a:buNone/>
             </a:pPr>
             <a:r>
@@ -2883,7 +3117,7 @@
             <a:endParaRPr lang="en-US" sz="1000" dirty="0"/>
           </a:p>
           <a:p>
-            <a:pPr marL="0" indent="0">
+            <a:pPr indent="0" marL="0">
               <a:buNone/>
             </a:pPr>
             <a:r>
@@ -2972,7 +3206,7 @@
           <a:bodyPr wrap="square" lIns="0" tIns="0" rIns="0" bIns="0" rtlCol="0" anchor="ctr"/>
           <a:lstStyle/>
           <a:p>
-            <a:pPr marL="0" indent="0">
+            <a:pPr indent="0" marL="0">
               <a:buNone/>
             </a:pPr>
             <a:r>
@@ -3011,7 +3245,7 @@
           <a:bodyPr wrap="square" lIns="0" tIns="0" rIns="0" bIns="0" rtlCol="0" anchor="t"/>
           <a:lstStyle/>
           <a:p>
-            <a:pPr marL="0" indent="0">
+            <a:pPr indent="0" marL="0">
               <a:buNone/>
             </a:pPr>
             <a:r>
@@ -3028,7 +3262,7 @@
             <a:endParaRPr lang="en-US" sz="1000" dirty="0"/>
           </a:p>
           <a:p>
-            <a:pPr marL="0" indent="0">
+            <a:pPr indent="0" marL="0">
               <a:buNone/>
             </a:pPr>
             <a:r>
@@ -3117,7 +3351,7 @@
           <a:bodyPr wrap="square" lIns="0" tIns="0" rIns="0" bIns="0" rtlCol="0" anchor="ctr"/>
           <a:lstStyle/>
           <a:p>
-            <a:pPr marL="0" indent="0">
+            <a:pPr indent="0" marL="0">
               <a:buNone/>
             </a:pPr>
             <a:r>
@@ -3156,7 +3390,7 @@
           <a:bodyPr wrap="square" lIns="0" tIns="0" rIns="0" bIns="0" rtlCol="0" anchor="t"/>
           <a:lstStyle/>
           <a:p>
-            <a:pPr marL="0" indent="0">
+            <a:pPr indent="0" marL="0">
               <a:buNone/>
             </a:pPr>
             <a:r>
@@ -3173,7 +3407,7 @@
             <a:endParaRPr lang="en-US" sz="1000" dirty="0"/>
           </a:p>
           <a:p>
-            <a:pPr marL="0" indent="0">
+            <a:pPr indent="0" marL="0">
               <a:buNone/>
             </a:pPr>
             <a:r>
@@ -3262,7 +3496,7 @@
           <a:bodyPr wrap="square" lIns="0" tIns="0" rIns="0" bIns="0" rtlCol="0" anchor="ctr"/>
           <a:lstStyle/>
           <a:p>
-            <a:pPr marL="0" indent="0">
+            <a:pPr indent="0" marL="0">
               <a:buNone/>
             </a:pPr>
             <a:r>
@@ -3301,7 +3535,7 @@
           <a:bodyPr wrap="square" lIns="0" tIns="0" rIns="0" bIns="0" rtlCol="0" anchor="t"/>
           <a:lstStyle/>
           <a:p>
-            <a:pPr marL="0" indent="0">
+            <a:pPr indent="0" marL="0">
               <a:buNone/>
             </a:pPr>
             <a:r>
@@ -3318,7 +3552,7 @@
             <a:endParaRPr lang="en-US" sz="1000" dirty="0"/>
           </a:p>
           <a:p>
-            <a:pPr marL="0" indent="0">
+            <a:pPr indent="0" marL="0">
               <a:buNone/>
             </a:pPr>
             <a:r>
@@ -3407,7 +3641,7 @@
           <a:bodyPr wrap="square" lIns="0" tIns="0" rIns="0" bIns="0" rtlCol="0" anchor="ctr"/>
           <a:lstStyle/>
           <a:p>
-            <a:pPr marL="0" indent="0">
+            <a:pPr indent="0" marL="0">
               <a:buNone/>
             </a:pPr>
             <a:r>
@@ -3446,7 +3680,7 @@
           <a:bodyPr wrap="square" lIns="0" tIns="0" rIns="0" bIns="0" rtlCol="0" anchor="t"/>
           <a:lstStyle/>
           <a:p>
-            <a:pPr marL="0" indent="0">
+            <a:pPr indent="0" marL="0">
               <a:buNone/>
             </a:pPr>
             <a:r>
@@ -3535,7 +3769,7 @@
           <a:bodyPr wrap="square" lIns="0" tIns="0" rIns="0" bIns="0" rtlCol="0" anchor="ctr"/>
           <a:lstStyle/>
           <a:p>
-            <a:pPr marL="0" indent="0">
+            <a:pPr indent="0" marL="0">
               <a:buNone/>
             </a:pPr>
             <a:r>
@@ -3574,7 +3808,7 @@
           <a:bodyPr wrap="square" lIns="0" tIns="0" rIns="0" bIns="0" rtlCol="0" anchor="t"/>
           <a:lstStyle/>
           <a:p>
-            <a:pPr marL="0" indent="0">
+            <a:pPr indent="0" marL="0">
               <a:buNone/>
             </a:pPr>
             <a:r>
@@ -3591,7 +3825,7 @@
             <a:endParaRPr lang="en-US" sz="1000" dirty="0"/>
           </a:p>
           <a:p>
-            <a:pPr marL="0" indent="0">
+            <a:pPr indent="0" marL="0">
               <a:buNone/>
             </a:pPr>
             <a:r>
@@ -3680,7 +3914,7 @@
           <a:bodyPr wrap="square" lIns="0" tIns="0" rIns="0" bIns="0" rtlCol="0" anchor="ctr"/>
           <a:lstStyle/>
           <a:p>
-            <a:pPr marL="0" indent="0">
+            <a:pPr indent="0" marL="0">
               <a:buNone/>
             </a:pPr>
             <a:r>
@@ -3719,7 +3953,7 @@
           <a:bodyPr wrap="square" lIns="0" tIns="0" rIns="0" bIns="0" rtlCol="0" anchor="t"/>
           <a:lstStyle/>
           <a:p>
-            <a:pPr marL="0" indent="0">
+            <a:pPr indent="0" marL="0">
               <a:buNone/>
             </a:pPr>
             <a:r>
@@ -3736,7 +3970,7 @@
             <a:endParaRPr lang="en-US" sz="1000" dirty="0"/>
           </a:p>
           <a:p>
-            <a:pPr marL="0" indent="0">
+            <a:pPr indent="0" marL="0">
               <a:buNone/>
             </a:pPr>
             <a:r>
@@ -3825,7 +4059,7 @@
           <a:bodyPr wrap="square" lIns="0" tIns="0" rIns="0" bIns="0" rtlCol="0" anchor="ctr"/>
           <a:lstStyle/>
           <a:p>
-            <a:pPr marL="0" indent="0">
+            <a:pPr indent="0" marL="0">
               <a:buNone/>
             </a:pPr>
             <a:r>
@@ -3864,7 +4098,7 @@
           <a:bodyPr wrap="square" lIns="0" tIns="0" rIns="0" bIns="0" rtlCol="0" anchor="t"/>
           <a:lstStyle/>
           <a:p>
-            <a:pPr marL="0" indent="0">
+            <a:pPr indent="0" marL="0">
               <a:buNone/>
             </a:pPr>
             <a:r>
@@ -3881,7 +4115,7 @@
             <a:endParaRPr lang="en-US" sz="1000" dirty="0"/>
           </a:p>
           <a:p>
-            <a:pPr marL="0" indent="0">
+            <a:pPr indent="0" marL="0">
               <a:buNone/>
             </a:pPr>
             <a:r>
@@ -3970,7 +4204,7 @@
           <a:bodyPr wrap="square" lIns="0" tIns="0" rIns="0" bIns="0" rtlCol="0" anchor="ctr"/>
           <a:lstStyle/>
           <a:p>
-            <a:pPr marL="0" indent="0">
+            <a:pPr indent="0" marL="0">
               <a:buNone/>
             </a:pPr>
             <a:r>
@@ -4009,7 +4243,7 @@
           <a:bodyPr wrap="square" lIns="0" tIns="0" rIns="0" bIns="0" rtlCol="0" anchor="t"/>
           <a:lstStyle/>
           <a:p>
-            <a:pPr marL="0" indent="0">
+            <a:pPr indent="0" marL="0">
               <a:buNone/>
             </a:pPr>
             <a:r>
@@ -4048,7 +4282,7 @@
           <a:bodyPr wrap="square" lIns="0" tIns="0" rIns="0" bIns="0" rtlCol="0" anchor="ctr"/>
           <a:lstStyle/>
           <a:p>
-            <a:pPr marL="0" indent="0" algn="r">
+            <a:pPr algn="r" indent="0" marL="0">
               <a:buNone/>
             </a:pPr>
             <a:r>
@@ -4082,7 +4316,6 @@
         <a:solidFill>
           <a:srgbClr val="FFFFFF"/>
         </a:solidFill>
-        <a:effectLst/>
       </p:bgPr>
     </p:bg>
     <p:spTree>
@@ -4120,7 +4353,7 @@
           <a:bodyPr wrap="square" lIns="0" tIns="0" rIns="0" bIns="0" rtlCol="0" anchor="ctr"/>
           <a:lstStyle/>
           <a:p>
-            <a:pPr marL="0" indent="0">
+            <a:pPr indent="0" marL="0">
               <a:buNone/>
             </a:pPr>
             <a:r>
@@ -4159,7 +4392,7 @@
           <a:bodyPr wrap="square" lIns="0" tIns="0" rIns="0" bIns="0" rtlCol="0" anchor="ctr"/>
           <a:lstStyle/>
           <a:p>
-            <a:pPr marL="0" indent="0">
+            <a:pPr indent="0" marL="0">
               <a:buNone/>
             </a:pPr>
             <a:r>
@@ -4248,7 +4481,7 @@
           <a:bodyPr wrap="square" lIns="0" tIns="0" rIns="0" bIns="0" rtlCol="0" anchor="ctr"/>
           <a:lstStyle/>
           <a:p>
-            <a:pPr marL="0" indent="0">
+            <a:pPr indent="0" marL="0">
               <a:buNone/>
             </a:pPr>
             <a:r>
@@ -4287,7 +4520,7 @@
           <a:bodyPr wrap="square" lIns="0" tIns="0" rIns="0" bIns="0" rtlCol="0" anchor="t"/>
           <a:lstStyle/>
           <a:p>
-            <a:pPr marL="0" indent="0">
+            <a:pPr indent="0" marL="0">
               <a:buNone/>
             </a:pPr>
             <a:r>
@@ -4304,7 +4537,7 @@
             <a:endParaRPr lang="en-US" sz="1000" dirty="0"/>
           </a:p>
           <a:p>
-            <a:pPr marL="0" indent="0">
+            <a:pPr indent="0" marL="0">
               <a:buNone/>
             </a:pPr>
             <a:r>
@@ -4417,7 +4650,7 @@
           <a:bodyPr wrap="square" lIns="0" tIns="0" rIns="0" bIns="0" rtlCol="0" anchor="ctr"/>
           <a:lstStyle/>
           <a:p>
-            <a:pPr marL="0" indent="0">
+            <a:pPr indent="0" marL="0">
               <a:buNone/>
             </a:pPr>
             <a:r>
@@ -4456,7 +4689,7 @@
           <a:bodyPr wrap="square" lIns="0" tIns="0" rIns="0" bIns="0" rtlCol="0" anchor="t"/>
           <a:lstStyle/>
           <a:p>
-            <a:pPr marL="0" indent="0">
+            <a:pPr indent="0" marL="0">
               <a:buNone/>
             </a:pPr>
             <a:r>
@@ -4473,7 +4706,7 @@
             <a:endParaRPr lang="en-US" sz="1000" dirty="0"/>
           </a:p>
           <a:p>
-            <a:pPr marL="0" indent="0">
+            <a:pPr indent="0" marL="0">
               <a:buNone/>
             </a:pPr>
             <a:r>
@@ -4586,7 +4819,7 @@
           <a:bodyPr wrap="square" lIns="0" tIns="0" rIns="0" bIns="0" rtlCol="0" anchor="ctr"/>
           <a:lstStyle/>
           <a:p>
-            <a:pPr marL="0" indent="0">
+            <a:pPr indent="0" marL="0">
               <a:buNone/>
             </a:pPr>
             <a:r>
@@ -4625,7 +4858,7 @@
           <a:bodyPr wrap="square" lIns="0" tIns="0" rIns="0" bIns="0" rtlCol="0" anchor="t"/>
           <a:lstStyle/>
           <a:p>
-            <a:pPr marL="0" indent="0">
+            <a:pPr indent="0" marL="0">
               <a:buNone/>
             </a:pPr>
             <a:r>
@@ -4642,7 +4875,7 @@
             <a:endParaRPr lang="en-US" sz="1000" dirty="0"/>
           </a:p>
           <a:p>
-            <a:pPr marL="0" indent="0">
+            <a:pPr indent="0" marL="0">
               <a:buNone/>
             </a:pPr>
             <a:r>
@@ -4755,7 +4988,7 @@
           <a:bodyPr wrap="square" lIns="0" tIns="0" rIns="0" bIns="0" rtlCol="0" anchor="ctr"/>
           <a:lstStyle/>
           <a:p>
-            <a:pPr marL="0" indent="0">
+            <a:pPr indent="0" marL="0">
               <a:buNone/>
             </a:pPr>
             <a:r>
@@ -4794,7 +5027,7 @@
           <a:bodyPr wrap="square" lIns="0" tIns="0" rIns="0" bIns="0" rtlCol="0" anchor="t"/>
           <a:lstStyle/>
           <a:p>
-            <a:pPr marL="0" indent="0">
+            <a:pPr indent="0" marL="0">
               <a:buNone/>
             </a:pPr>
             <a:r>
@@ -4811,7 +5044,7 @@
             <a:endParaRPr lang="en-US" sz="1000" dirty="0"/>
           </a:p>
           <a:p>
-            <a:pPr marL="0" indent="0">
+            <a:pPr indent="0" marL="0">
               <a:buNone/>
             </a:pPr>
             <a:r>
@@ -4924,7 +5157,7 @@
           <a:bodyPr wrap="square" lIns="0" tIns="0" rIns="0" bIns="0" rtlCol="0" anchor="ctr"/>
           <a:lstStyle/>
           <a:p>
-            <a:pPr marL="0" indent="0">
+            <a:pPr indent="0" marL="0">
               <a:buNone/>
             </a:pPr>
             <a:r>
@@ -4963,7 +5196,7 @@
           <a:bodyPr wrap="square" lIns="0" tIns="0" rIns="0" bIns="0" rtlCol="0" anchor="t"/>
           <a:lstStyle/>
           <a:p>
-            <a:pPr marL="0" indent="0">
+            <a:pPr indent="0" marL="0">
               <a:buNone/>
             </a:pPr>
             <a:r>
@@ -4980,7 +5213,7 @@
             <a:endParaRPr lang="en-US" sz="1000" dirty="0"/>
           </a:p>
           <a:p>
-            <a:pPr marL="0" indent="0">
+            <a:pPr indent="0" marL="0">
               <a:buNone/>
             </a:pPr>
             <a:r>
@@ -5006,8 +5239,8 @@
         </p:nvSpPr>
         <p:spPr>
           <a:xfrm>
-            <a:off x="457200" y="4023360"/>
-            <a:ext cx="11247120" cy="1828800"/>
+            <a:off x="457200" y="3657600"/>
+            <a:ext cx="11247120" cy="2011680"/>
           </a:xfrm>
           <a:prstGeom prst="rect">
             <a:avLst/>
@@ -5019,11 +5252,14 @@
           <a:bodyPr wrap="square" lIns="0" tIns="0" rIns="0" bIns="0" rtlCol="0" anchor="t"/>
           <a:lstStyle/>
           <a:p>
-            <a:pPr marL="0" indent="0">
-              <a:buNone/>
-            </a:pPr>
-            <a:r>
-              <a:rPr lang="en-US" sz="1200" b="1" dirty="0">
+            <a:pPr indent="0" marL="0">
+              <a:spcAft>
+                <a:spcPts val="600"/>
+              </a:spcAft>
+              <a:buNone/>
+            </a:pPr>
+            <a:r>
+              <a:rPr lang="en-US" sz="1300" b="1" dirty="0">
                 <a:solidFill>
                   <a:srgbClr val="1E2761"/>
                 </a:solidFill>
@@ -5033,8 +5269,14 @@
               </a:rPr>
               <a:t>CLICK 合成: </a:t>
             </a:r>
-            <a:r>
-              <a:rPr lang="en-US" sz="1200" dirty="0">
+            <a:pPr indent="0" marL="0">
+              <a:spcAft>
+                <a:spcPts val="600"/>
+              </a:spcAft>
+              <a:buNone/>
+            </a:pPr>
+            <a:r>
+              <a:rPr lang="en-US" sz="1300" dirty="0">
                 <a:solidFill>
                   <a:srgbClr val="1A1A1A"/>
                 </a:solidFill>
@@ -5045,8 +5287,14 @@
               <a:t>Main で PRESS と RELEASE の対が成立したら CLICK を追加発火 (autoRepeat は除外)
 </a:t>
             </a:r>
-            <a:r>
-              <a:rPr lang="en-US" sz="1200" b="1" dirty="0">
+            <a:pPr indent="0" marL="0">
+              <a:spcAft>
+                <a:spcPts val="600"/>
+              </a:spcAft>
+              <a:buNone/>
+            </a:pPr>
+            <a:r>
+              <a:rPr lang="en-US" sz="1300" b="1" dirty="0">
                 <a:solidFill>
                   <a:srgbClr val="1E2761"/>
                 </a:solidFill>
@@ -5056,8 +5304,14 @@
               </a:rPr>
               <a:t>吸収判定: </a:t>
             </a:r>
-            <a:r>
-              <a:rPr lang="en-US" sz="1200" dirty="0">
+            <a:pPr indent="0" marL="0">
+              <a:spcAft>
+                <a:spcPts val="600"/>
+              </a:spcAft>
+              <a:buNone/>
+            </a:pPr>
+            <a:r>
+              <a:rPr lang="en-US" sz="1300" dirty="0">
                 <a:solidFill>
                   <a:srgbClr val="1A1A1A"/>
                 </a:solidFill>
@@ -5068,8 +5322,14 @@
               <a:t>Scene の handleAbsorb() が true を返すと view に転送せず、scene が直接処理する (例: NormalScene の MENU/HOME)
 </a:t>
             </a:r>
-            <a:r>
-              <a:rPr lang="en-US" sz="1200" b="1" dirty="0">
+            <a:pPr indent="0" marL="0">
+              <a:spcAft>
+                <a:spcPts val="600"/>
+              </a:spcAft>
+              <a:buNone/>
+            </a:pPr>
+            <a:r>
+              <a:rPr lang="en-US" sz="1300" b="1" dirty="0">
                 <a:solidFill>
                   <a:srgbClr val="1E2761"/>
                 </a:solidFill>
@@ -5079,8 +5339,14 @@
               </a:rPr>
               <a:t>入力一時停止: </a:t>
             </a:r>
-            <a:r>
-              <a:rPr lang="en-US" sz="1200" dirty="0">
+            <a:pPr indent="0" marL="0">
+              <a:spcAft>
+                <a:spcPts val="600"/>
+              </a:spcAft>
+              <a:buNone/>
+            </a:pPr>
+            <a:r>
+              <a:rPr lang="en-US" sz="1300" dirty="0">
                 <a:solidFill>
                   <a:srgbClr val="1A1A1A"/>
                 </a:solidFill>
@@ -5090,7 +5356,7 @@
               </a:rPr>
               <a:t>TransitionManager の遷移中は KeyDispatcher.enabled = false で dispatch を no-op 化</a:t>
             </a:r>
-            <a:endParaRPr lang="en-US" sz="1200" dirty="0"/>
+            <a:endParaRPr lang="en-US" sz="1300" dirty="0"/>
           </a:p>
         </p:txBody>
       </p:sp>
@@ -5102,8 +5368,8 @@
         </p:nvSpPr>
         <p:spPr>
           <a:xfrm>
-            <a:off x="457200" y="5852160"/>
-            <a:ext cx="11247120" cy="640080"/>
+            <a:off x="457200" y="5943600"/>
+            <a:ext cx="11247120" cy="548640"/>
           </a:xfrm>
           <a:prstGeom prst="rect">
             <a:avLst/>
@@ -5127,8 +5393,8 @@
         </p:nvSpPr>
         <p:spPr>
           <a:xfrm>
-            <a:off x="594360" y="5897880"/>
-            <a:ext cx="10972800" cy="548640"/>
+            <a:off x="594360" y="5989320"/>
+            <a:ext cx="10972800" cy="457200"/>
           </a:xfrm>
           <a:prstGeom prst="rect">
             <a:avLst/>
@@ -5140,7 +5406,7 @@
           <a:bodyPr wrap="square" lIns="0" tIns="0" rIns="0" bIns="0" rtlCol="0" anchor="ctr"/>
           <a:lstStyle/>
           <a:p>
-            <a:pPr marL="0" indent="0">
+            <a:pPr indent="0" marL="0">
               <a:buNone/>
             </a:pPr>
             <a:r>
@@ -5179,7 +5445,7 @@
           <a:bodyPr wrap="square" lIns="0" tIns="0" rIns="0" bIns="0" rtlCol="0" anchor="ctr"/>
           <a:lstStyle/>
           <a:p>
-            <a:pPr marL="0" indent="0" algn="r">
+            <a:pPr algn="r" indent="0" marL="0">
               <a:buNone/>
             </a:pPr>
             <a:r>
@@ -5213,7 +5479,6 @@
         <a:solidFill>
           <a:srgbClr val="FFFFFF"/>
         </a:solidFill>
-        <a:effectLst/>
       </p:bgPr>
     </p:bg>
     <p:spTree>
@@ -5251,7 +5516,7 @@
           <a:bodyPr wrap="square" lIns="0" tIns="0" rIns="0" bIns="0" rtlCol="0" anchor="ctr"/>
           <a:lstStyle/>
           <a:p>
-            <a:pPr marL="0" indent="0">
+            <a:pPr indent="0" marL="0">
               <a:buNone/>
             </a:pPr>
             <a:r>
@@ -5290,7 +5555,7 @@
           <a:bodyPr wrap="square" lIns="0" tIns="0" rIns="0" bIns="0" rtlCol="0" anchor="ctr"/>
           <a:lstStyle/>
           <a:p>
-            <a:pPr marL="0" indent="0">
+            <a:pPr indent="0" marL="0">
               <a:buNone/>
             </a:pPr>
             <a:r>
@@ -5354,7 +5619,7 @@
           <a:bodyPr wrap="square" lIns="0" tIns="0" rIns="0" bIns="0" rtlCol="0" anchor="ctr"/>
           <a:lstStyle/>
           <a:p>
-            <a:pPr marL="0" indent="0" algn="ctr">
+            <a:pPr algn="ctr" indent="0" marL="0">
               <a:buNone/>
             </a:pPr>
             <a:r>
@@ -5418,7 +5683,7 @@
           <a:bodyPr wrap="square" lIns="0" tIns="0" rIns="0" bIns="0" rtlCol="0" anchor="t"/>
           <a:lstStyle/>
           <a:p>
-            <a:pPr marL="0" indent="0">
+            <a:pPr indent="0" marL="0">
               <a:buNone/>
             </a:pPr>
             <a:r>
@@ -5432,6 +5697,9 @@
               </a:rPr>
               <a:t>User</a:t>
             </a:r>
+            <a:pPr indent="0" marL="0">
+              <a:buNone/>
+            </a:pPr>
             <a:r>
               <a:rPr lang="en-US" sz="1200" dirty="0">
                 <a:solidFill>
@@ -5443,14 +5711,17 @@
               </a:rPr>
               <a:t>  </a:t>
             </a:r>
+            <a:pPr indent="0" marL="0">
+              <a:buNone/>
+            </a:pPr>
             <a:r>
               <a:rPr lang="en-US" sz="1200" dirty="0">
                 <a:solidFill>
                   <a:srgbClr val="1A1A1A"/>
                 </a:solidFill>
-                <a:latin typeface="Consolas" pitchFamily="34" charset="0"/>
-                <a:ea typeface="Consolas" pitchFamily="34" charset="-122"/>
-                <a:cs typeface="Consolas" pitchFamily="34" charset="-120"/>
+                <a:latin typeface="Calibri" pitchFamily="34" charset="0"/>
+                <a:ea typeface="Calibri" pitchFamily="34" charset="-122"/>
+                <a:cs typeface="Calibri" pitchFamily="34" charset="-120"/>
               </a:rPr>
               <a:t>PRESS Qt.Key_X (HOME)</a:t>
             </a:r>
@@ -5479,7 +5750,7 @@
           <a:bodyPr wrap="square" lIns="0" tIns="0" rIns="0" bIns="0" rtlCol="0" anchor="t"/>
           <a:lstStyle/>
           <a:p>
-            <a:pPr marL="0" indent="0">
+            <a:pPr indent="0" marL="0">
               <a:buNone/>
             </a:pPr>
             <a:r>
@@ -5567,7 +5838,7 @@
           <a:bodyPr wrap="square" lIns="0" tIns="0" rIns="0" bIns="0" rtlCol="0" anchor="ctr"/>
           <a:lstStyle/>
           <a:p>
-            <a:pPr marL="0" indent="0" algn="ctr">
+            <a:pPr algn="ctr" indent="0" marL="0">
               <a:buNone/>
             </a:pPr>
             <a:r>
@@ -5631,7 +5902,7 @@
           <a:bodyPr wrap="square" lIns="0" tIns="0" rIns="0" bIns="0" rtlCol="0" anchor="t"/>
           <a:lstStyle/>
           <a:p>
-            <a:pPr marL="0" indent="0">
+            <a:pPr indent="0" marL="0">
               <a:buNone/>
             </a:pPr>
             <a:r>
@@ -5645,6 +5916,9 @@
               </a:rPr>
               <a:t>Main.qml</a:t>
             </a:r>
+            <a:pPr indent="0" marL="0">
+              <a:buNone/>
+            </a:pPr>
             <a:r>
               <a:rPr lang="en-US" sz="1200" dirty="0">
                 <a:solidFill>
@@ -5656,14 +5930,17 @@
               </a:rPr>
               <a:t>  </a:t>
             </a:r>
+            <a:pPr indent="0" marL="0">
+              <a:buNone/>
+            </a:pPr>
             <a:r>
               <a:rPr lang="en-US" sz="1200" dirty="0">
                 <a:solidFill>
                   <a:srgbClr val="1A1A1A"/>
                 </a:solidFill>
-                <a:latin typeface="Consolas" pitchFamily="34" charset="0"/>
-                <a:ea typeface="Consolas" pitchFamily="34" charset="-122"/>
-                <a:cs typeface="Consolas" pitchFamily="34" charset="-120"/>
+                <a:latin typeface="Calibri" pitchFamily="34" charset="0"/>
+                <a:ea typeface="Calibri" pitchFamily="34" charset="-122"/>
+                <a:cs typeface="Calibri" pitchFamily="34" charset="-120"/>
               </a:rPr>
               <a:t>Keys.onPressed → dispatchToScene(HOME, PRESS)</a:t>
             </a:r>
@@ -5692,7 +5969,7 @@
           <a:bodyPr wrap="square" lIns="0" tIns="0" rIns="0" bIns="0" rtlCol="0" anchor="t"/>
           <a:lstStyle/>
           <a:p>
-            <a:pPr marL="0" indent="0">
+            <a:pPr indent="0" marL="0">
               <a:buNone/>
             </a:pPr>
             <a:r>
@@ -5780,7 +6057,7 @@
           <a:bodyPr wrap="square" lIns="0" tIns="0" rIns="0" bIns="0" rtlCol="0" anchor="ctr"/>
           <a:lstStyle/>
           <a:p>
-            <a:pPr marL="0" indent="0" algn="ctr">
+            <a:pPr algn="ctr" indent="0" marL="0">
               <a:buNone/>
             </a:pPr>
             <a:r>
@@ -5844,7 +6121,7 @@
           <a:bodyPr wrap="square" lIns="0" tIns="0" rIns="0" bIns="0" rtlCol="0" anchor="t"/>
           <a:lstStyle/>
           <a:p>
-            <a:pPr marL="0" indent="0">
+            <a:pPr indent="0" marL="0">
               <a:buNone/>
             </a:pPr>
             <a:r>
@@ -5858,6 +6135,9 @@
               </a:rPr>
               <a:t>KeyDispatcher</a:t>
             </a:r>
+            <a:pPr indent="0" marL="0">
+              <a:buNone/>
+            </a:pPr>
             <a:r>
               <a:rPr lang="en-US" sz="1200" dirty="0">
                 <a:solidFill>
@@ -5869,14 +6149,17 @@
               </a:rPr>
               <a:t>  </a:t>
             </a:r>
+            <a:pPr indent="0" marL="0">
+              <a:buNone/>
+            </a:pPr>
             <a:r>
               <a:rPr lang="en-US" sz="1200" dirty="0">
                 <a:solidFill>
                   <a:srgbClr val="1A1A1A"/>
                 </a:solidFill>
-                <a:latin typeface="Consolas" pitchFamily="34" charset="0"/>
-                <a:ea typeface="Consolas" pitchFamily="34" charset="-122"/>
-                <a:cs typeface="Consolas" pitchFamily="34" charset="-120"/>
+                <a:latin typeface="Calibri" pitchFamily="34" charset="0"/>
+                <a:ea typeface="Calibri" pitchFamily="34" charset="-122"/>
+                <a:cs typeface="Calibri" pitchFamily="34" charset="-120"/>
               </a:rPr>
               <a:t>sceneEventVk=HOME / sceneEventGen++</a:t>
             </a:r>
@@ -5905,7 +6188,7 @@
           <a:bodyPr wrap="square" lIns="0" tIns="0" rIns="0" bIns="0" rtlCol="0" anchor="t"/>
           <a:lstStyle/>
           <a:p>
-            <a:pPr marL="0" indent="0">
+            <a:pPr indent="0" marL="0">
               <a:buNone/>
             </a:pPr>
             <a:r>
@@ -5993,7 +6276,7 @@
           <a:bodyPr wrap="square" lIns="0" tIns="0" rIns="0" bIns="0" rtlCol="0" anchor="ctr"/>
           <a:lstStyle/>
           <a:p>
-            <a:pPr marL="0" indent="0" algn="ctr">
+            <a:pPr algn="ctr" indent="0" marL="0">
               <a:buNone/>
             </a:pPr>
             <a:r>
@@ -6057,7 +6340,7 @@
           <a:bodyPr wrap="square" lIns="0" tIns="0" rIns="0" bIns="0" rtlCol="0" anchor="t"/>
           <a:lstStyle/>
           <a:p>
-            <a:pPr marL="0" indent="0">
+            <a:pPr indent="0" marL="0">
               <a:buNone/>
             </a:pPr>
             <a:r>
@@ -6071,6 +6354,9 @@
               </a:rPr>
               <a:t>NormalScene</a:t>
             </a:r>
+            <a:pPr indent="0" marL="0">
+              <a:buNone/>
+            </a:pPr>
             <a:r>
               <a:rPr lang="en-US" sz="1200" dirty="0">
                 <a:solidFill>
@@ -6082,14 +6368,17 @@
               </a:rPr>
               <a:t>  </a:t>
             </a:r>
+            <a:pPr indent="0" marL="0">
+              <a:buNone/>
+            </a:pPr>
             <a:r>
               <a:rPr lang="en-US" sz="1200" dirty="0">
                 <a:solidFill>
                   <a:srgbClr val="1A1A1A"/>
                 </a:solidFill>
-                <a:latin typeface="Consolas" pitchFamily="34" charset="0"/>
-                <a:ea typeface="Consolas" pitchFamily="34" charset="-122"/>
-                <a:cs typeface="Consolas" pitchFamily="34" charset="-120"/>
+                <a:latin typeface="Calibri" pitchFamily="34" charset="0"/>
+                <a:ea typeface="Calibri" pitchFamily="34" charset="-122"/>
+                <a:cs typeface="Calibri" pitchFamily="34" charset="-120"/>
               </a:rPr>
               <a:t>handleAbsorb(HOME, PRESS) → false (PRESS は吸収しない)</a:t>
             </a:r>
@@ -6118,7 +6407,7 @@
           <a:bodyPr wrap="square" lIns="0" tIns="0" rIns="0" bIns="0" rtlCol="0" anchor="t"/>
           <a:lstStyle/>
           <a:p>
-            <a:pPr marL="0" indent="0">
+            <a:pPr indent="0" marL="0">
               <a:buNone/>
             </a:pPr>
             <a:r>
@@ -6206,7 +6495,7 @@
           <a:bodyPr wrap="square" lIns="0" tIns="0" rIns="0" bIns="0" rtlCol="0" anchor="ctr"/>
           <a:lstStyle/>
           <a:p>
-            <a:pPr marL="0" indent="0" algn="ctr">
+            <a:pPr algn="ctr" indent="0" marL="0">
               <a:buNone/>
             </a:pPr>
             <a:r>
@@ -6270,7 +6559,7 @@
           <a:bodyPr wrap="square" lIns="0" tIns="0" rIns="0" bIns="0" rtlCol="0" anchor="t"/>
           <a:lstStyle/>
           <a:p>
-            <a:pPr marL="0" indent="0">
+            <a:pPr indent="0" marL="0">
               <a:buNone/>
             </a:pPr>
             <a:r>
@@ -6284,6 +6573,9 @@
               </a:rPr>
               <a:t>User</a:t>
             </a:r>
+            <a:pPr indent="0" marL="0">
+              <a:buNone/>
+            </a:pPr>
             <a:r>
               <a:rPr lang="en-US" sz="1200" dirty="0">
                 <a:solidFill>
@@ -6295,14 +6587,17 @@
               </a:rPr>
               <a:t>  </a:t>
             </a:r>
+            <a:pPr indent="0" marL="0">
+              <a:buNone/>
+            </a:pPr>
             <a:r>
               <a:rPr lang="en-US" sz="1200" dirty="0">
                 <a:solidFill>
                   <a:srgbClr val="1A1A1A"/>
                 </a:solidFill>
-                <a:latin typeface="Consolas" pitchFamily="34" charset="0"/>
-                <a:ea typeface="Consolas" pitchFamily="34" charset="-122"/>
-                <a:cs typeface="Consolas" pitchFamily="34" charset="-120"/>
+                <a:latin typeface="Calibri" pitchFamily="34" charset="0"/>
+                <a:ea typeface="Calibri" pitchFamily="34" charset="-122"/>
+                <a:cs typeface="Calibri" pitchFamily="34" charset="-120"/>
               </a:rPr>
               <a:t>RELEASE Qt.Key_X</a:t>
             </a:r>
@@ -6331,7 +6626,7 @@
           <a:bodyPr wrap="square" lIns="0" tIns="0" rIns="0" bIns="0" rtlCol="0" anchor="t"/>
           <a:lstStyle/>
           <a:p>
-            <a:pPr marL="0" indent="0">
+            <a:pPr indent="0" marL="0">
               <a:buNone/>
             </a:pPr>
             <a:r>
@@ -6419,7 +6714,7 @@
           <a:bodyPr wrap="square" lIns="0" tIns="0" rIns="0" bIns="0" rtlCol="0" anchor="ctr"/>
           <a:lstStyle/>
           <a:p>
-            <a:pPr marL="0" indent="0" algn="ctr">
+            <a:pPr algn="ctr" indent="0" marL="0">
               <a:buNone/>
             </a:pPr>
             <a:r>
@@ -6483,7 +6778,7 @@
           <a:bodyPr wrap="square" lIns="0" tIns="0" rIns="0" bIns="0" rtlCol="0" anchor="t"/>
           <a:lstStyle/>
           <a:p>
-            <a:pPr marL="0" indent="0">
+            <a:pPr indent="0" marL="0">
               <a:buNone/>
             </a:pPr>
             <a:r>
@@ -6497,6 +6792,9 @@
               </a:rPr>
               <a:t>Main.qml</a:t>
             </a:r>
+            <a:pPr indent="0" marL="0">
+              <a:buNone/>
+            </a:pPr>
             <a:r>
               <a:rPr lang="en-US" sz="1200" dirty="0">
                 <a:solidFill>
@@ -6508,14 +6806,17 @@
               </a:rPr>
               <a:t>  </a:t>
             </a:r>
+            <a:pPr indent="0" marL="0">
+              <a:buNone/>
+            </a:pPr>
             <a:r>
               <a:rPr lang="en-US" sz="1200" dirty="0">
                 <a:solidFill>
                   <a:srgbClr val="1A1A1A"/>
                 </a:solidFill>
-                <a:latin typeface="Consolas" pitchFamily="34" charset="0"/>
-                <a:ea typeface="Consolas" pitchFamily="34" charset="-122"/>
-                <a:cs typeface="Consolas" pitchFamily="34" charset="-120"/>
+                <a:latin typeface="Calibri" pitchFamily="34" charset="0"/>
+                <a:ea typeface="Calibri" pitchFamily="34" charset="-122"/>
+                <a:cs typeface="Calibri" pitchFamily="34" charset="-120"/>
               </a:rPr>
               <a:t>dispatchToScene(HOME, CLICK) ★ 合成</a:t>
             </a:r>
@@ -6544,7 +6845,7 @@
           <a:bodyPr wrap="square" lIns="0" tIns="0" rIns="0" bIns="0" rtlCol="0" anchor="t"/>
           <a:lstStyle/>
           <a:p>
-            <a:pPr marL="0" indent="0">
+            <a:pPr indent="0" marL="0">
               <a:buNone/>
             </a:pPr>
             <a:r>
@@ -6632,7 +6933,7 @@
           <a:bodyPr wrap="square" lIns="0" tIns="0" rIns="0" bIns="0" rtlCol="0" anchor="ctr"/>
           <a:lstStyle/>
           <a:p>
-            <a:pPr marL="0" indent="0" algn="ctr">
+            <a:pPr algn="ctr" indent="0" marL="0">
               <a:buNone/>
             </a:pPr>
             <a:r>
@@ -6696,7 +6997,7 @@
           <a:bodyPr wrap="square" lIns="0" tIns="0" rIns="0" bIns="0" rtlCol="0" anchor="t"/>
           <a:lstStyle/>
           <a:p>
-            <a:pPr marL="0" indent="0">
+            <a:pPr indent="0" marL="0">
               <a:buNone/>
             </a:pPr>
             <a:r>
@@ -6710,6 +7011,9 @@
               </a:rPr>
               <a:t>NormalScene</a:t>
             </a:r>
+            <a:pPr indent="0" marL="0">
+              <a:buNone/>
+            </a:pPr>
             <a:r>
               <a:rPr lang="en-US" sz="1200" dirty="0">
                 <a:solidFill>
@@ -6721,14 +7025,17 @@
               </a:rPr>
               <a:t>  </a:t>
             </a:r>
+            <a:pPr indent="0" marL="0">
+              <a:buNone/>
+            </a:pPr>
             <a:r>
               <a:rPr lang="en-US" sz="1200" dirty="0">
                 <a:solidFill>
                   <a:srgbClr val="1A1A1A"/>
                 </a:solidFill>
-                <a:latin typeface="Consolas" pitchFamily="34" charset="0"/>
-                <a:ea typeface="Consolas" pitchFamily="34" charset="-122"/>
-                <a:cs typeface="Consolas" pitchFamily="34" charset="-120"/>
+                <a:latin typeface="Calibri" pitchFamily="34" charset="0"/>
+                <a:ea typeface="Calibri" pitchFamily="34" charset="-122"/>
+                <a:cs typeface="Calibri" pitchFamily="34" charset="-120"/>
               </a:rPr>
               <a:t>handleAbsorb(HOME, CLICK) → true ★ 吸収</a:t>
             </a:r>
@@ -6757,7 +7064,7 @@
           <a:bodyPr wrap="square" lIns="0" tIns="0" rIns="0" bIns="0" rtlCol="0" anchor="t"/>
           <a:lstStyle/>
           <a:p>
-            <a:pPr marL="0" indent="0">
+            <a:pPr indent="0" marL="0">
               <a:buNone/>
             </a:pPr>
             <a:r>
@@ -6769,7 +7076,7 @@
                 <a:ea typeface="Calibri" pitchFamily="34" charset="-122"/>
                 <a:cs typeface="Calibri" pitchFamily="34" charset="-120"/>
               </a:rPr>
-              <a:t>Mediator.requestNavigate(idNormalHome, Next) を呼ぶ。View には到達しない</a:t>
+              <a:t>Mediator.requestNavigate(ViewId.NormalHome, Next) を呼ぶ。View には到達しない</a:t>
             </a:r>
             <a:endParaRPr lang="en-US" sz="1000" dirty="0"/>
           </a:p>
@@ -6845,7 +7152,7 @@
           <a:bodyPr wrap="square" lIns="0" tIns="0" rIns="0" bIns="0" rtlCol="0" anchor="ctr"/>
           <a:lstStyle/>
           <a:p>
-            <a:pPr marL="0" indent="0" algn="ctr">
+            <a:pPr algn="ctr" indent="0" marL="0">
               <a:buNone/>
             </a:pPr>
             <a:r>
@@ -6909,7 +7216,7 @@
           <a:bodyPr wrap="square" lIns="0" tIns="0" rIns="0" bIns="0" rtlCol="0" anchor="t"/>
           <a:lstStyle/>
           <a:p>
-            <a:pPr marL="0" indent="0">
+            <a:pPr indent="0" marL="0">
               <a:buNone/>
             </a:pPr>
             <a:r>
@@ -6923,6 +7230,9 @@
               </a:rPr>
               <a:t>Mediator → TransitionManager</a:t>
             </a:r>
+            <a:pPr indent="0" marL="0">
+              <a:buNone/>
+            </a:pPr>
             <a:r>
               <a:rPr lang="en-US" sz="1200" dirty="0">
                 <a:solidFill>
@@ -6934,16 +7244,19 @@
               </a:rPr>
               <a:t>  </a:t>
             </a:r>
+            <a:pPr indent="0" marL="0">
+              <a:buNone/>
+            </a:pPr>
             <a:r>
               <a:rPr lang="en-US" sz="1200" dirty="0">
                 <a:solidFill>
                   <a:srgbClr val="1A1A1A"/>
                 </a:solidFill>
-                <a:latin typeface="Consolas" pitchFamily="34" charset="0"/>
-                <a:ea typeface="Consolas" pitchFamily="34" charset="-122"/>
-                <a:cs typeface="Consolas" pitchFamily="34" charset="-120"/>
-              </a:rPr>
-              <a:t>startTransition(idNormalHome, Next)</a:t>
+                <a:latin typeface="Calibri" pitchFamily="34" charset="0"/>
+                <a:ea typeface="Calibri" pitchFamily="34" charset="-122"/>
+                <a:cs typeface="Calibri" pitchFamily="34" charset="-120"/>
+              </a:rPr>
+              <a:t>startTransition(ViewId.NormalHome, Next)</a:t>
             </a:r>
             <a:endParaRPr lang="en-US" sz="1200" dirty="0"/>
           </a:p>
@@ -6970,7 +7283,7 @@
           <a:bodyPr wrap="square" lIns="0" tIns="0" rIns="0" bIns="0" rtlCol="0" anchor="t"/>
           <a:lstStyle/>
           <a:p>
-            <a:pPr marL="0" indent="0">
+            <a:pPr indent="0" marL="0">
               <a:buNone/>
             </a:pPr>
             <a:r>
@@ -7009,7 +7322,7 @@
           <a:bodyPr wrap="square" lIns="0" tIns="0" rIns="0" bIns="0" rtlCol="0" anchor="ctr"/>
           <a:lstStyle/>
           <a:p>
-            <a:pPr marL="0" indent="0" algn="r">
+            <a:pPr algn="r" indent="0" marL="0">
               <a:buNone/>
             </a:pPr>
             <a:r>
@@ -7043,7 +7356,6 @@
         <a:solidFill>
           <a:srgbClr val="FFFFFF"/>
         </a:solidFill>
-        <a:effectLst/>
       </p:bgPr>
     </p:bg>
     <p:spTree>
@@ -7081,7 +7393,7 @@
           <a:bodyPr wrap="square" lIns="0" tIns="0" rIns="0" bIns="0" rtlCol="0" anchor="ctr"/>
           <a:lstStyle/>
           <a:p>
-            <a:pPr marL="0" indent="0">
+            <a:pPr indent="0" marL="0">
               <a:buNone/>
             </a:pPr>
             <a:r>
@@ -7120,7 +7432,7 @@
           <a:bodyPr wrap="square" lIns="0" tIns="0" rIns="0" bIns="0" rtlCol="0" anchor="ctr"/>
           <a:lstStyle/>
           <a:p>
-            <a:pPr marL="0" indent="0">
+            <a:pPr indent="0" marL="0">
               <a:buNone/>
             </a:pPr>
             <a:r>
@@ -7209,7 +7521,7 @@
           <a:bodyPr wrap="square" lIns="0" tIns="0" rIns="0" bIns="0" rtlCol="0" anchor="ctr"/>
           <a:lstStyle/>
           <a:p>
-            <a:pPr marL="0" indent="0">
+            <a:pPr indent="0" marL="0">
               <a:buNone/>
             </a:pPr>
             <a:r>
@@ -7248,7 +7560,7 @@
           <a:bodyPr wrap="square" lIns="0" tIns="0" rIns="0" bIns="0" rtlCol="0" anchor="t"/>
           <a:lstStyle/>
           <a:p>
-            <a:pPr marL="0" indent="0">
+            <a:pPr indent="0" marL="0">
               <a:buNone/>
             </a:pPr>
             <a:r>
@@ -7337,7 +7649,7 @@
           <a:bodyPr wrap="square" lIns="0" tIns="0" rIns="0" bIns="0" rtlCol="0" anchor="ctr"/>
           <a:lstStyle/>
           <a:p>
-            <a:pPr marL="0" indent="0">
+            <a:pPr indent="0" marL="0">
               <a:buNone/>
             </a:pPr>
             <a:r>
@@ -7376,7 +7688,7 @@
           <a:bodyPr wrap="square" lIns="0" tIns="0" rIns="0" bIns="0" rtlCol="0" anchor="t"/>
           <a:lstStyle/>
           <a:p>
-            <a:pPr marL="0" indent="0">
+            <a:pPr indent="0" marL="0">
               <a:buNone/>
             </a:pPr>
             <a:r>
@@ -7393,7 +7705,7 @@
             <a:endParaRPr lang="en-US" sz="1000" dirty="0"/>
           </a:p>
           <a:p>
-            <a:pPr marL="0" indent="0">
+            <a:pPr indent="0" marL="0">
               <a:buNone/>
             </a:pPr>
             <a:r>
@@ -7410,7 +7722,7 @@
             <a:endParaRPr lang="en-US" sz="1000" dirty="0"/>
           </a:p>
           <a:p>
-            <a:pPr marL="0" indent="0">
+            <a:pPr indent="0" marL="0">
               <a:buNone/>
             </a:pPr>
             <a:r>
@@ -7427,7 +7739,7 @@
             <a:endParaRPr lang="en-US" sz="1000" dirty="0"/>
           </a:p>
           <a:p>
-            <a:pPr marL="0" indent="0">
+            <a:pPr indent="0" marL="0">
               <a:buNone/>
             </a:pPr>
             <a:r>
@@ -7516,7 +7828,7 @@
           <a:bodyPr wrap="square" lIns="0" tIns="0" rIns="0" bIns="0" rtlCol="0" anchor="ctr"/>
           <a:lstStyle/>
           <a:p>
-            <a:pPr marL="0" indent="0">
+            <a:pPr indent="0" marL="0">
               <a:buNone/>
             </a:pPr>
             <a:r>
@@ -7555,7 +7867,7 @@
           <a:bodyPr wrap="square" lIns="0" tIns="0" rIns="0" bIns="0" rtlCol="0" anchor="t"/>
           <a:lstStyle/>
           <a:p>
-            <a:pPr marL="0" indent="0">
+            <a:pPr indent="0" marL="0">
               <a:buNone/>
             </a:pPr>
             <a:r>
@@ -7572,7 +7884,7 @@
             <a:endParaRPr lang="en-US" sz="1000" dirty="0"/>
           </a:p>
           <a:p>
-            <a:pPr marL="0" indent="0">
+            <a:pPr indent="0" marL="0">
               <a:buNone/>
             </a:pPr>
             <a:r>
@@ -7589,7 +7901,7 @@
             <a:endParaRPr lang="en-US" sz="1000" dirty="0"/>
           </a:p>
           <a:p>
-            <a:pPr marL="0" indent="0">
+            <a:pPr indent="0" marL="0">
               <a:buNone/>
             </a:pPr>
             <a:r>
@@ -7606,7 +7918,7 @@
             <a:endParaRPr lang="en-US" sz="1000" dirty="0"/>
           </a:p>
           <a:p>
-            <a:pPr marL="0" indent="0">
+            <a:pPr indent="0" marL="0">
               <a:buNone/>
             </a:pPr>
             <a:r>
@@ -7671,7 +7983,7 @@
           <a:bodyPr wrap="square" lIns="0" tIns="0" rIns="0" bIns="0" rtlCol="0" anchor="ctr"/>
           <a:lstStyle/>
           <a:p>
-            <a:pPr marL="0" indent="0" algn="ctr">
+            <a:pPr algn="ctr" indent="0" marL="0">
               <a:buNone/>
             </a:pPr>
             <a:r>
@@ -7679,9 +7991,9 @@
                 <a:solidFill>
                   <a:srgbClr val="1E2761"/>
                 </a:solidFill>
-                <a:latin typeface="Consolas" pitchFamily="34" charset="0"/>
-                <a:ea typeface="Consolas" pitchFamily="34" charset="-122"/>
-                <a:cs typeface="Consolas" pitchFamily="34" charset="-120"/>
+                <a:latin typeface="Calibri" pitchFamily="34" charset="0"/>
+                <a:ea typeface="Calibri" pitchFamily="34" charset="-122"/>
+                <a:cs typeface="Calibri" pitchFamily="34" charset="-120"/>
               </a:rPr>
               <a:t>startTransition</a:t>
             </a:r>
@@ -7698,7 +8010,7 @@
         <p:spPr>
           <a:xfrm>
             <a:off x="6080760" y="2103120"/>
-            <a:ext cx="0" cy="457200"/>
+            <a:ext cx="-3200400" cy="457200"/>
           </a:xfrm>
           <a:prstGeom prst="line">
             <a:avLst/>
@@ -7808,7 +8120,7 @@
           <a:bodyPr wrap="square" lIns="0" tIns="0" rIns="0" bIns="0" rtlCol="0" anchor="ctr"/>
           <a:lstStyle/>
           <a:p>
-            <a:pPr marL="0" indent="0">
+            <a:pPr indent="0" marL="0">
               <a:buNone/>
             </a:pPr>
             <a:r>
@@ -7847,7 +8159,7 @@
           <a:bodyPr wrap="square" lIns="0" tIns="0" rIns="0" bIns="0" rtlCol="0" anchor="t"/>
           <a:lstStyle/>
           <a:p>
-            <a:pPr marL="0" indent="0">
+            <a:pPr indent="0" marL="0">
               <a:buNone/>
             </a:pPr>
             <a:r>
@@ -7864,7 +8176,7 @@
             <a:endParaRPr lang="en-US" sz="1000" dirty="0"/>
           </a:p>
           <a:p>
-            <a:pPr marL="0" indent="0">
+            <a:pPr indent="0" marL="0">
               <a:buNone/>
             </a:pPr>
             <a:r>
@@ -7881,7 +8193,7 @@
             <a:endParaRPr lang="en-US" sz="1000" dirty="0"/>
           </a:p>
           <a:p>
-            <a:pPr marL="0" indent="0">
+            <a:pPr indent="0" marL="0">
               <a:buNone/>
             </a:pPr>
             <a:r>
@@ -7970,7 +8282,7 @@
           <a:bodyPr wrap="square" lIns="0" tIns="0" rIns="0" bIns="0" rtlCol="0" anchor="ctr"/>
           <a:lstStyle/>
           <a:p>
-            <a:pPr marL="0" indent="0">
+            <a:pPr indent="0" marL="0">
               <a:buNone/>
             </a:pPr>
             <a:r>
@@ -8009,7 +8321,7 @@
           <a:bodyPr wrap="square" lIns="0" tIns="0" rIns="0" bIns="0" rtlCol="0" anchor="t"/>
           <a:lstStyle/>
           <a:p>
-            <a:pPr marL="0" indent="0">
+            <a:pPr indent="0" marL="0">
               <a:buNone/>
             </a:pPr>
             <a:r>
@@ -8026,7 +8338,7 @@
             <a:endParaRPr lang="en-US" sz="1000" dirty="0"/>
           </a:p>
           <a:p>
-            <a:pPr marL="0" indent="0">
+            <a:pPr indent="0" marL="0">
               <a:buNone/>
             </a:pPr>
             <a:r>
@@ -8043,7 +8355,7 @@
             <a:endParaRPr lang="en-US" sz="1000" dirty="0"/>
           </a:p>
           <a:p>
-            <a:pPr marL="0" indent="0">
+            <a:pPr indent="0" marL="0">
               <a:buNone/>
             </a:pPr>
             <a:r>
@@ -8060,7 +8372,7 @@
             <a:endParaRPr lang="en-US" sz="1000" dirty="0"/>
           </a:p>
           <a:p>
-            <a:pPr marL="0" indent="0">
+            <a:pPr indent="0" marL="0">
               <a:buNone/>
             </a:pPr>
             <a:r>
@@ -8125,7 +8437,7 @@
           <a:bodyPr wrap="square" lIns="0" tIns="0" rIns="0" bIns="0" rtlCol="0" anchor="ctr"/>
           <a:lstStyle/>
           <a:p>
-            <a:pPr marL="0" indent="0" algn="ctr">
+            <a:pPr algn="ctr" indent="0" marL="0">
               <a:buNone/>
             </a:pPr>
             <a:r>
@@ -8133,9 +8445,9 @@
                 <a:solidFill>
                   <a:srgbClr val="1E2761"/>
                 </a:solidFill>
-                <a:latin typeface="Consolas" pitchFamily="34" charset="0"/>
-                <a:ea typeface="Consolas" pitchFamily="34" charset="-122"/>
-                <a:cs typeface="Consolas" pitchFamily="34" charset="-120"/>
+                <a:latin typeface="Calibri" pitchFamily="34" charset="0"/>
+                <a:ea typeface="Calibri" pitchFamily="34" charset="-122"/>
+                <a:cs typeface="Calibri" pitchFamily="34" charset="-120"/>
               </a:rPr>
               <a:t>lifecycle = Leaving</a:t>
             </a:r>
@@ -8190,7 +8502,7 @@
           <a:bodyPr wrap="square" lIns="0" tIns="0" rIns="0" bIns="0" rtlCol="0" anchor="ctr"/>
           <a:lstStyle/>
           <a:p>
-            <a:pPr marL="0" indent="0" algn="ctr">
+            <a:pPr algn="ctr" indent="0" marL="0">
               <a:buNone/>
             </a:pPr>
             <a:r>
@@ -8198,9 +8510,9 @@
                 <a:solidFill>
                   <a:srgbClr val="1E2761"/>
                 </a:solidFill>
-                <a:latin typeface="Consolas" pitchFamily="34" charset="0"/>
-                <a:ea typeface="Consolas" pitchFamily="34" charset="-122"/>
-                <a:cs typeface="Consolas" pitchFamily="34" charset="-120"/>
+                <a:latin typeface="Calibri" pitchFamily="34" charset="0"/>
+                <a:ea typeface="Calibri" pitchFamily="34" charset="-122"/>
+                <a:cs typeface="Calibri" pitchFamily="34" charset="-120"/>
               </a:rPr>
               <a:t>lifecycle = Entering</a:t>
             </a:r>
@@ -8279,7 +8591,7 @@
           <a:bodyPr wrap="square" lIns="0" tIns="0" rIns="0" bIns="0" rtlCol="0" anchor="ctr"/>
           <a:lstStyle/>
           <a:p>
-            <a:pPr marL="0" indent="0">
+            <a:pPr indent="0" marL="0">
               <a:buNone/>
             </a:pPr>
             <a:r>
@@ -8318,7 +8630,7 @@
           <a:bodyPr wrap="square" lIns="0" tIns="0" rIns="0" bIns="0" rtlCol="0" anchor="t"/>
           <a:lstStyle/>
           <a:p>
-            <a:pPr marL="0" indent="0">
+            <a:pPr indent="0" marL="0">
               <a:buNone/>
             </a:pPr>
             <a:r>
@@ -8335,7 +8647,7 @@
             <a:endParaRPr lang="en-US" sz="1000" dirty="0"/>
           </a:p>
           <a:p>
-            <a:pPr marL="0" indent="0">
+            <a:pPr indent="0" marL="0">
               <a:buNone/>
             </a:pPr>
             <a:r>
@@ -8400,7 +8712,7 @@
           <a:bodyPr wrap="square" lIns="0" tIns="0" rIns="0" bIns="0" rtlCol="0" anchor="ctr"/>
           <a:lstStyle/>
           <a:p>
-            <a:pPr marL="0" indent="0" algn="ctr">
+            <a:pPr algn="ctr" indent="0" marL="0">
               <a:buNone/>
             </a:pPr>
             <a:r>
@@ -8408,9 +8720,9 @@
                 <a:solidFill>
                   <a:srgbClr val="1E2761"/>
                 </a:solidFill>
-                <a:latin typeface="Consolas" pitchFamily="34" charset="0"/>
-                <a:ea typeface="Consolas" pitchFamily="34" charset="-122"/>
-                <a:cs typeface="Consolas" pitchFamily="34" charset="-120"/>
+                <a:latin typeface="Calibri" pitchFamily="34" charset="0"/>
+                <a:ea typeface="Calibri" pitchFamily="34" charset="-122"/>
+                <a:cs typeface="Calibri" pitchFamily="34" charset="-120"/>
               </a:rPr>
               <a:t>reportLeaveComplete</a:t>
             </a:r>
@@ -8427,7 +8739,7 @@
         <p:spPr>
           <a:xfrm>
             <a:off x="9281160" y="5577840"/>
-            <a:ext cx="0" cy="274320"/>
+            <a:ext cx="-2423160" cy="274320"/>
           </a:xfrm>
           <a:prstGeom prst="line">
             <a:avLst/>
@@ -8465,7 +8777,7 @@
           <a:bodyPr wrap="square" lIns="0" tIns="0" rIns="0" bIns="0" rtlCol="0" anchor="ctr"/>
           <a:lstStyle/>
           <a:p>
-            <a:pPr marL="0" indent="0" algn="ctr">
+            <a:pPr algn="ctr" indent="0" marL="0">
               <a:buNone/>
             </a:pPr>
             <a:r>
@@ -8473,9 +8785,9 @@
                 <a:solidFill>
                   <a:srgbClr val="1E2761"/>
                 </a:solidFill>
-                <a:latin typeface="Consolas" pitchFamily="34" charset="0"/>
-                <a:ea typeface="Consolas" pitchFamily="34" charset="-122"/>
-                <a:cs typeface="Consolas" pitchFamily="34" charset="-120"/>
+                <a:latin typeface="Calibri" pitchFamily="34" charset="0"/>
+                <a:ea typeface="Calibri" pitchFamily="34" charset="-122"/>
+                <a:cs typeface="Calibri" pitchFamily="34" charset="-120"/>
               </a:rPr>
               <a:t>reportEnterComplete</a:t>
             </a:r>
@@ -8504,7 +8816,7 @@
           <a:bodyPr wrap="square" lIns="0" tIns="0" rIns="0" bIns="0" rtlCol="0" anchor="ctr"/>
           <a:lstStyle/>
           <a:p>
-            <a:pPr marL="0" indent="0" algn="r">
+            <a:pPr algn="r" indent="0" marL="0">
               <a:buNone/>
             </a:pPr>
             <a:r>
@@ -8538,7 +8850,6 @@
         <a:solidFill>
           <a:srgbClr val="FFFFFF"/>
         </a:solidFill>
-        <a:effectLst/>
       </p:bgPr>
     </p:bg>
     <p:spTree>
@@ -8576,7 +8887,7 @@
           <a:bodyPr wrap="square" lIns="0" tIns="0" rIns="0" bIns="0" rtlCol="0" anchor="ctr"/>
           <a:lstStyle/>
           <a:p>
-            <a:pPr marL="0" indent="0">
+            <a:pPr indent="0" marL="0">
               <a:buNone/>
             </a:pPr>
             <a:r>
@@ -8615,7 +8926,7 @@
           <a:bodyPr wrap="square" lIns="0" tIns="0" rIns="0" bIns="0" rtlCol="0" anchor="ctr"/>
           <a:lstStyle/>
           <a:p>
-            <a:pPr marL="0" indent="0">
+            <a:pPr indent="0" marL="0">
               <a:buNone/>
             </a:pPr>
             <a:r>
@@ -8679,7 +8990,7 @@
           <a:bodyPr wrap="square" lIns="0" tIns="0" rIns="0" bIns="0" rtlCol="0" anchor="ctr"/>
           <a:lstStyle/>
           <a:p>
-            <a:pPr marL="0" indent="0" algn="ctr">
+            <a:pPr algn="ctr" indent="0" marL="0">
               <a:buNone/>
             </a:pPr>
             <a:r>
@@ -8743,7 +9054,7 @@
           <a:bodyPr wrap="square" lIns="0" tIns="0" rIns="0" bIns="0" rtlCol="0" anchor="t"/>
           <a:lstStyle/>
           <a:p>
-            <a:pPr marL="0" indent="0">
+            <a:pPr indent="0" marL="0">
               <a:buNone/>
             </a:pPr>
             <a:r>
@@ -8757,6 +9068,9 @@
               </a:rPr>
               <a:t>NormalScene</a:t>
             </a:r>
+            <a:pPr indent="0" marL="0">
+              <a:buNone/>
+            </a:pPr>
             <a:r>
               <a:rPr lang="en-US" sz="1200" dirty="0">
                 <a:solidFill>
@@ -8768,16 +9082,19 @@
               </a:rPr>
               <a:t>  </a:t>
             </a:r>
+            <a:pPr indent="0" marL="0">
+              <a:buNone/>
+            </a:pPr>
             <a:r>
               <a:rPr lang="en-US" sz="1200" dirty="0">
                 <a:solidFill>
                   <a:srgbClr val="1A1A1A"/>
                 </a:solidFill>
-                <a:latin typeface="Consolas" pitchFamily="34" charset="0"/>
-                <a:ea typeface="Consolas" pitchFamily="34" charset="-122"/>
-                <a:cs typeface="Consolas" pitchFamily="34" charset="-120"/>
-              </a:rPr>
-              <a:t>handleAbsorb(MENU, CLICK) → requestNavigate(idNormalMenu, Next)</a:t>
+                <a:latin typeface="Calibri" pitchFamily="34" charset="0"/>
+                <a:ea typeface="Calibri" pitchFamily="34" charset="-122"/>
+                <a:cs typeface="Calibri" pitchFamily="34" charset="-120"/>
+              </a:rPr>
+              <a:t>handleAbsorb(MENU, CLICK) → requestNavigate(ViewId.NormalMenu, Next)</a:t>
             </a:r>
             <a:endParaRPr lang="en-US" sz="1200" dirty="0"/>
           </a:p>
@@ -8804,7 +9121,7 @@
           <a:bodyPr wrap="square" lIns="0" tIns="0" rIns="0" bIns="0" rtlCol="0" anchor="t"/>
           <a:lstStyle/>
           <a:p>
-            <a:pPr marL="0" indent="0">
+            <a:pPr indent="0" marL="0">
               <a:buNone/>
             </a:pPr>
             <a:r>
@@ -8892,7 +9209,7 @@
           <a:bodyPr wrap="square" lIns="0" tIns="0" rIns="0" bIns="0" rtlCol="0" anchor="ctr"/>
           <a:lstStyle/>
           <a:p>
-            <a:pPr marL="0" indent="0" algn="ctr">
+            <a:pPr algn="ctr" indent="0" marL="0">
               <a:buNone/>
             </a:pPr>
             <a:r>
@@ -8956,7 +9273,7 @@
           <a:bodyPr wrap="square" lIns="0" tIns="0" rIns="0" bIns="0" rtlCol="0" anchor="t"/>
           <a:lstStyle/>
           <a:p>
-            <a:pPr marL="0" indent="0">
+            <a:pPr indent="0" marL="0">
               <a:buNone/>
             </a:pPr>
             <a:r>
@@ -8970,6 +9287,9 @@
               </a:rPr>
               <a:t>Mediator</a:t>
             </a:r>
+            <a:pPr indent="0" marL="0">
+              <a:buNone/>
+            </a:pPr>
             <a:r>
               <a:rPr lang="en-US" sz="1200" dirty="0">
                 <a:solidFill>
@@ -8981,14 +9301,17 @@
               </a:rPr>
               <a:t>  </a:t>
             </a:r>
+            <a:pPr indent="0" marL="0">
+              <a:buNone/>
+            </a:pPr>
             <a:r>
               <a:rPr lang="en-US" sz="1200" dirty="0">
                 <a:solidFill>
                   <a:srgbClr val="1A1A1A"/>
                 </a:solidFill>
-                <a:latin typeface="Consolas" pitchFamily="34" charset="0"/>
-                <a:ea typeface="Consolas" pitchFamily="34" charset="-122"/>
-                <a:cs typeface="Consolas" pitchFamily="34" charset="-120"/>
+                <a:latin typeface="Calibri" pitchFamily="34" charset="0"/>
+                <a:ea typeface="Calibri" pitchFamily="34" charset="-122"/>
+                <a:cs typeface="Calibri" pitchFamily="34" charset="-120"/>
               </a:rPr>
               <a:t>nextLoadingViewId 公開 / history.push / currentViewId 更新</a:t>
             </a:r>
@@ -9017,7 +9340,7 @@
           <a:bodyPr wrap="square" lIns="0" tIns="0" rIns="0" bIns="0" rtlCol="0" anchor="t"/>
           <a:lstStyle/>
           <a:p>
-            <a:pPr marL="0" indent="0">
+            <a:pPr indent="0" marL="0">
               <a:buNone/>
             </a:pPr>
             <a:endParaRPr lang="en-US" sz="1000" dirty="0"/>
@@ -9094,7 +9417,7 @@
           <a:bodyPr wrap="square" lIns="0" tIns="0" rIns="0" bIns="0" rtlCol="0" anchor="ctr"/>
           <a:lstStyle/>
           <a:p>
-            <a:pPr marL="0" indent="0" algn="ctr">
+            <a:pPr algn="ctr" indent="0" marL="0">
               <a:buNone/>
             </a:pPr>
             <a:r>
@@ -9158,7 +9481,7 @@
           <a:bodyPr wrap="square" lIns="0" tIns="0" rIns="0" bIns="0" rtlCol="0" anchor="t"/>
           <a:lstStyle/>
           <a:p>
-            <a:pPr marL="0" indent="0">
+            <a:pPr indent="0" marL="0">
               <a:buNone/>
             </a:pPr>
             <a:r>
@@ -9172,6 +9495,9 @@
               </a:rPr>
               <a:t>TransitionManager</a:t>
             </a:r>
+            <a:pPr indent="0" marL="0">
+              <a:buNone/>
+            </a:pPr>
             <a:r>
               <a:rPr lang="en-US" sz="1200" dirty="0">
                 <a:solidFill>
@@ -9183,16 +9509,19 @@
               </a:rPr>
               <a:t>  </a:t>
             </a:r>
+            <a:pPr indent="0" marL="0">
+              <a:buNone/>
+            </a:pPr>
             <a:r>
               <a:rPr lang="en-US" sz="1200" dirty="0">
                 <a:solidFill>
                   <a:srgbClr val="1A1A1A"/>
                 </a:solidFill>
-                <a:latin typeface="Consolas" pitchFamily="34" charset="0"/>
-                <a:ea typeface="Consolas" pitchFamily="34" charset="-122"/>
-                <a:cs typeface="Consolas" pitchFamily="34" charset="-120"/>
-              </a:rPr>
-              <a:t>startTransition(idNormalMenu, Next)</a:t>
+                <a:latin typeface="Calibri" pitchFamily="34" charset="0"/>
+                <a:ea typeface="Calibri" pitchFamily="34" charset="-122"/>
+                <a:cs typeface="Calibri" pitchFamily="34" charset="-120"/>
+              </a:rPr>
+              <a:t>startTransition(ViewId.NormalMenu, Next)</a:t>
             </a:r>
             <a:endParaRPr lang="en-US" sz="1200" dirty="0"/>
           </a:p>
@@ -9219,7 +9548,7 @@
           <a:bodyPr wrap="square" lIns="0" tIns="0" rIns="0" bIns="0" rtlCol="0" anchor="t"/>
           <a:lstStyle/>
           <a:p>
-            <a:pPr marL="0" indent="0">
+            <a:pPr indent="0" marL="0">
               <a:buNone/>
             </a:pPr>
             <a:r>
@@ -9307,7 +9636,7 @@
           <a:bodyPr wrap="square" lIns="0" tIns="0" rIns="0" bIns="0" rtlCol="0" anchor="ctr"/>
           <a:lstStyle/>
           <a:p>
-            <a:pPr marL="0" indent="0" algn="ctr">
+            <a:pPr algn="ctr" indent="0" marL="0">
               <a:buNone/>
             </a:pPr>
             <a:r>
@@ -9371,7 +9700,7 @@
           <a:bodyPr wrap="square" lIns="0" tIns="0" rIns="0" bIns="0" rtlCol="0" anchor="t"/>
           <a:lstStyle/>
           <a:p>
-            <a:pPr marL="0" indent="0">
+            <a:pPr indent="0" marL="0">
               <a:buNone/>
             </a:pPr>
             <a:r>
@@ -9385,6 +9714,9 @@
               </a:rPr>
               <a:t>TransitionManager</a:t>
             </a:r>
+            <a:pPr indent="0" marL="0">
+              <a:buNone/>
+            </a:pPr>
             <a:r>
               <a:rPr lang="en-US" sz="1200" dirty="0">
                 <a:solidFill>
@@ -9396,14 +9728,17 @@
               </a:rPr>
               <a:t>  </a:t>
             </a:r>
+            <a:pPr indent="0" marL="0">
+              <a:buNone/>
+            </a:pPr>
             <a:r>
               <a:rPr lang="en-US" sz="1200" dirty="0">
                 <a:solidFill>
                   <a:srgbClr val="1A1A1A"/>
                 </a:solidFill>
-                <a:latin typeface="Consolas" pitchFamily="34" charset="0"/>
-                <a:ea typeface="Consolas" pitchFamily="34" charset="-122"/>
-                <a:cs typeface="Consolas" pitchFamily="34" charset="-120"/>
+                <a:latin typeface="Calibri" pitchFamily="34" charset="0"/>
+                <a:ea typeface="Calibri" pitchFamily="34" charset="-122"/>
+                <a:cs typeface="Calibri" pitchFamily="34" charset="-120"/>
               </a:rPr>
               <a:t>viewSlotB metadata 設定 → viewSlotA metadata 設定 → viewSlotBSource ★最後</a:t>
             </a:r>
@@ -9432,7 +9767,7 @@
           <a:bodyPr wrap="square" lIns="0" tIns="0" rIns="0" bIns="0" rtlCol="0" anchor="t"/>
           <a:lstStyle/>
           <a:p>
-            <a:pPr marL="0" indent="0">
+            <a:pPr indent="0" marL="0">
               <a:buNone/>
             </a:pPr>
             <a:r>
@@ -9520,7 +9855,7 @@
           <a:bodyPr wrap="square" lIns="0" tIns="0" rIns="0" bIns="0" rtlCol="0" anchor="ctr"/>
           <a:lstStyle/>
           <a:p>
-            <a:pPr marL="0" indent="0" algn="ctr">
+            <a:pPr algn="ctr" indent="0" marL="0">
               <a:buNone/>
             </a:pPr>
             <a:r>
@@ -9584,7 +9919,7 @@
           <a:bodyPr wrap="square" lIns="0" tIns="0" rIns="0" bIns="0" rtlCol="0" anchor="t"/>
           <a:lstStyle/>
           <a:p>
-            <a:pPr marL="0" indent="0">
+            <a:pPr indent="0" marL="0">
               <a:buNone/>
             </a:pPr>
             <a:r>
@@ -9598,6 +9933,9 @@
               </a:rPr>
               <a:t>HomeView (slot A)</a:t>
             </a:r>
+            <a:pPr indent="0" marL="0">
+              <a:buNone/>
+            </a:pPr>
             <a:r>
               <a:rPr lang="en-US" sz="1200" dirty="0">
                 <a:solidFill>
@@ -9609,14 +9947,17 @@
               </a:rPr>
               <a:t>  </a:t>
             </a:r>
+            <a:pPr indent="0" marL="0">
+              <a:buNone/>
+            </a:pPr>
             <a:r>
               <a:rPr lang="en-US" sz="1200" dirty="0">
                 <a:solidFill>
                   <a:srgbClr val="1A1A1A"/>
                 </a:solidFill>
-                <a:latin typeface="Consolas" pitchFamily="34" charset="0"/>
-                <a:ea typeface="Consolas" pitchFamily="34" charset="-122"/>
-                <a:cs typeface="Consolas" pitchFamily="34" charset="-120"/>
+                <a:latin typeface="Calibri" pitchFamily="34" charset="0"/>
+                <a:ea typeface="Calibri" pitchFamily="34" charset="-122"/>
+                <a:cs typeface="Calibri" pitchFamily="34" charset="-120"/>
               </a:rPr>
               <a:t>myLifecycle=Leaving 検知 → performLeave → leaveAnim.start (random ms)</a:t>
             </a:r>
@@ -9645,7 +9986,7 @@
           <a:bodyPr wrap="square" lIns="0" tIns="0" rIns="0" bIns="0" rtlCol="0" anchor="t"/>
           <a:lstStyle/>
           <a:p>
-            <a:pPr marL="0" indent="0">
+            <a:pPr indent="0" marL="0">
               <a:buNone/>
             </a:pPr>
             <a:r>
@@ -9733,7 +10074,7 @@
           <a:bodyPr wrap="square" lIns="0" tIns="0" rIns="0" bIns="0" rtlCol="0" anchor="ctr"/>
           <a:lstStyle/>
           <a:p>
-            <a:pPr marL="0" indent="0" algn="ctr">
+            <a:pPr algn="ctr" indent="0" marL="0">
               <a:buNone/>
             </a:pPr>
             <a:r>
@@ -9797,7 +10138,7 @@
           <a:bodyPr wrap="square" lIns="0" tIns="0" rIns="0" bIns="0" rtlCol="0" anchor="t"/>
           <a:lstStyle/>
           <a:p>
-            <a:pPr marL="0" indent="0">
+            <a:pPr indent="0" marL="0">
               <a:buNone/>
             </a:pPr>
             <a:r>
@@ -9811,6 +10152,9 @@
               </a:rPr>
               <a:t>MenuView (slot B 新規ロード)</a:t>
             </a:r>
+            <a:pPr indent="0" marL="0">
+              <a:buNone/>
+            </a:pPr>
             <a:r>
               <a:rPr lang="en-US" sz="1200" dirty="0">
                 <a:solidFill>
@@ -9822,14 +10166,17 @@
               </a:rPr>
               <a:t>  </a:t>
             </a:r>
+            <a:pPr indent="0" marL="0">
+              <a:buNone/>
+            </a:pPr>
             <a:r>
               <a:rPr lang="en-US" sz="1200" dirty="0">
                 <a:solidFill>
                   <a:srgbClr val="1A1A1A"/>
                 </a:solidFill>
-                <a:latin typeface="Consolas" pitchFamily="34" charset="0"/>
-                <a:ea typeface="Consolas" pitchFamily="34" charset="-122"/>
-                <a:cs typeface="Consolas" pitchFamily="34" charset="-120"/>
+                <a:latin typeface="Calibri" pitchFamily="34" charset="0"/>
+                <a:ea typeface="Calibri" pitchFamily="34" charset="-122"/>
+                <a:cs typeface="Calibri" pitchFamily="34" charset="-120"/>
               </a:rPr>
               <a:t>Component.onCompleted → onEntering で cursor 復元 → performEnter → enterAnim.start</a:t>
             </a:r>
@@ -9858,7 +10205,7 @@
           <a:bodyPr wrap="square" lIns="0" tIns="0" rIns="0" bIns="0" rtlCol="0" anchor="t"/>
           <a:lstStyle/>
           <a:p>
-            <a:pPr marL="0" indent="0">
+            <a:pPr indent="0" marL="0">
               <a:buNone/>
             </a:pPr>
             <a:r>
@@ -9946,7 +10293,7 @@
           <a:bodyPr wrap="square" lIns="0" tIns="0" rIns="0" bIns="0" rtlCol="0" anchor="ctr"/>
           <a:lstStyle/>
           <a:p>
-            <a:pPr marL="0" indent="0" algn="ctr">
+            <a:pPr algn="ctr" indent="0" marL="0">
               <a:buNone/>
             </a:pPr>
             <a:r>
@@ -10010,7 +10357,7 @@
           <a:bodyPr wrap="square" lIns="0" tIns="0" rIns="0" bIns="0" rtlCol="0" anchor="t"/>
           <a:lstStyle/>
           <a:p>
-            <a:pPr marL="0" indent="0">
+            <a:pPr indent="0" marL="0">
               <a:buNone/>
             </a:pPr>
             <a:r>
@@ -10024,6 +10371,9 @@
               </a:rPr>
               <a:t>HomeView / MenuView</a:t>
             </a:r>
+            <a:pPr indent="0" marL="0">
+              <a:buNone/>
+            </a:pPr>
             <a:r>
               <a:rPr lang="en-US" sz="1200" dirty="0">
                 <a:solidFill>
@@ -10035,14 +10385,17 @@
               </a:rPr>
               <a:t>  </a:t>
             </a:r>
+            <a:pPr indent="0" marL="0">
+              <a:buNone/>
+            </a:pPr>
             <a:r>
               <a:rPr lang="en-US" sz="1200" dirty="0">
                 <a:solidFill>
                   <a:srgbClr val="1A1A1A"/>
                 </a:solidFill>
-                <a:latin typeface="Consolas" pitchFamily="34" charset="0"/>
-                <a:ea typeface="Consolas" pitchFamily="34" charset="-122"/>
-                <a:cs typeface="Consolas" pitchFamily="34" charset="-120"/>
+                <a:latin typeface="Calibri" pitchFamily="34" charset="0"/>
+                <a:ea typeface="Calibri" pitchFamily="34" charset="-122"/>
+                <a:cs typeface="Calibri" pitchFamily="34" charset="-120"/>
               </a:rPr>
               <a:t>それぞれ onStopped → reportLeaveComplete / reportEnterComplete</a:t>
             </a:r>
@@ -10071,7 +10424,7 @@
           <a:bodyPr wrap="square" lIns="0" tIns="0" rIns="0" bIns="0" rtlCol="0" anchor="t"/>
           <a:lstStyle/>
           <a:p>
-            <a:pPr marL="0" indent="0">
+            <a:pPr indent="0" marL="0">
               <a:buNone/>
             </a:pPr>
             <a:endParaRPr lang="en-US" sz="1000" dirty="0"/>
@@ -10148,7 +10501,7 @@
           <a:bodyPr wrap="square" lIns="0" tIns="0" rIns="0" bIns="0" rtlCol="0" anchor="ctr"/>
           <a:lstStyle/>
           <a:p>
-            <a:pPr marL="0" indent="0" algn="ctr">
+            <a:pPr algn="ctr" indent="0" marL="0">
               <a:buNone/>
             </a:pPr>
             <a:r>
@@ -10212,7 +10565,7 @@
           <a:bodyPr wrap="square" lIns="0" tIns="0" rIns="0" bIns="0" rtlCol="0" anchor="t"/>
           <a:lstStyle/>
           <a:p>
-            <a:pPr marL="0" indent="0">
+            <a:pPr indent="0" marL="0">
               <a:buNone/>
             </a:pPr>
             <a:r>
@@ -10226,6 +10579,9 @@
               </a:rPr>
               <a:t>TransitionManager</a:t>
             </a:r>
+            <a:pPr indent="0" marL="0">
+              <a:buNone/>
+            </a:pPr>
             <a:r>
               <a:rPr lang="en-US" sz="1200" dirty="0">
                 <a:solidFill>
@@ -10237,14 +10593,17 @@
               </a:rPr>
               <a:t>  </a:t>
             </a:r>
+            <a:pPr indent="0" marL="0">
+              <a:buNone/>
+            </a:pPr>
             <a:r>
               <a:rPr lang="en-US" sz="1200" dirty="0">
                 <a:solidFill>
                   <a:srgbClr val="1A1A1A"/>
                 </a:solidFill>
-                <a:latin typeface="Consolas" pitchFamily="34" charset="0"/>
-                <a:ea typeface="Consolas" pitchFamily="34" charset="-122"/>
-                <a:cs typeface="Consolas" pitchFamily="34" charset="-120"/>
+                <a:latin typeface="Calibri" pitchFamily="34" charset="0"/>
+                <a:ea typeface="Calibri" pitchFamily="34" charset="-122"/>
+                <a:cs typeface="Calibri" pitchFamily="34" charset="-120"/>
               </a:rPr>
               <a:t>両完了確認 → finalizeTransition (HomeView 解放 / viewAIsCurrent=false)</a:t>
             </a:r>
@@ -10273,7 +10632,7 @@
           <a:bodyPr wrap="square" lIns="0" tIns="0" rIns="0" bIns="0" rtlCol="0" anchor="t"/>
           <a:lstStyle/>
           <a:p>
-            <a:pPr marL="0" indent="0">
+            <a:pPr indent="0" marL="0">
               <a:buNone/>
             </a:pPr>
             <a:r>
@@ -10312,7 +10671,7 @@
           <a:bodyPr wrap="square" lIns="0" tIns="0" rIns="0" bIns="0" rtlCol="0" anchor="ctr"/>
           <a:lstStyle/>
           <a:p>
-            <a:pPr marL="0" indent="0" algn="r">
+            <a:pPr algn="r" indent="0" marL="0">
               <a:buNone/>
             </a:pPr>
             <a:r>
@@ -10346,7 +10705,6 @@
         <a:solidFill>
           <a:srgbClr val="FFFFFF"/>
         </a:solidFill>
-        <a:effectLst/>
       </p:bgPr>
     </p:bg>
     <p:spTree>
@@ -10384,7 +10742,7 @@
           <a:bodyPr wrap="square" lIns="0" tIns="0" rIns="0" bIns="0" rtlCol="0" anchor="ctr"/>
           <a:lstStyle/>
           <a:p>
-            <a:pPr marL="0" indent="0">
+            <a:pPr indent="0" marL="0">
               <a:buNone/>
             </a:pPr>
             <a:r>
@@ -10423,7 +10781,7 @@
           <a:bodyPr wrap="square" lIns="0" tIns="0" rIns="0" bIns="0" rtlCol="0" anchor="ctr"/>
           <a:lstStyle/>
           <a:p>
-            <a:pPr marL="0" indent="0">
+            <a:pPr indent="0" marL="0">
               <a:buNone/>
             </a:pPr>
             <a:r>
@@ -10487,7 +10845,7 @@
           <a:bodyPr wrap="square" lIns="0" tIns="0" rIns="0" bIns="0" rtlCol="0" anchor="ctr"/>
           <a:lstStyle/>
           <a:p>
-            <a:pPr marL="0" indent="0" algn="ctr">
+            <a:pPr algn="ctr" indent="0" marL="0">
               <a:buNone/>
             </a:pPr>
             <a:r>
@@ -10551,7 +10909,7 @@
           <a:bodyPr wrap="square" lIns="0" tIns="0" rIns="0" bIns="0" rtlCol="0" anchor="t"/>
           <a:lstStyle/>
           <a:p>
-            <a:pPr marL="0" indent="0">
+            <a:pPr indent="0" marL="0">
               <a:buNone/>
             </a:pPr>
             <a:r>
@@ -10565,6 +10923,9 @@
               </a:rPr>
               <a:t>HomeView</a:t>
             </a:r>
+            <a:pPr indent="0" marL="0">
+              <a:buNone/>
+            </a:pPr>
             <a:r>
               <a:rPr lang="en-US" sz="1200" dirty="0">
                 <a:solidFill>
@@ -10576,16 +10937,19 @@
               </a:rPr>
               <a:t>  </a:t>
             </a:r>
+            <a:pPr indent="0" marL="0">
+              <a:buNone/>
+            </a:pPr>
             <a:r>
               <a:rPr lang="en-US" sz="1200" dirty="0">
                 <a:solidFill>
                   <a:srgbClr val="1A1A1A"/>
                 </a:solidFill>
-                <a:latin typeface="Consolas" pitchFamily="34" charset="0"/>
-                <a:ea typeface="Consolas" pitchFamily="34" charset="-122"/>
-                <a:cs typeface="Consolas" pitchFamily="34" charset="-120"/>
-              </a:rPr>
-              <a:t>ENTER CLICK → requestNavigate(idClosingClosing, Next)</a:t>
+                <a:latin typeface="Calibri" pitchFamily="34" charset="0"/>
+                <a:ea typeface="Calibri" pitchFamily="34" charset="-122"/>
+                <a:cs typeface="Calibri" pitchFamily="34" charset="-120"/>
+              </a:rPr>
+              <a:t>ENTER CLICK → requestNavigate(ViewId.ClosingClosing, Next)</a:t>
             </a:r>
             <a:endParaRPr lang="en-US" sz="1200" dirty="0"/>
           </a:p>
@@ -10612,7 +10976,7 @@
           <a:bodyPr wrap="square" lIns="0" tIns="0" rIns="0" bIns="0" rtlCol="0" anchor="t"/>
           <a:lstStyle/>
           <a:p>
-            <a:pPr marL="0" indent="0">
+            <a:pPr indent="0" marL="0">
               <a:buNone/>
             </a:pPr>
             <a:r>
@@ -10700,7 +11064,7 @@
           <a:bodyPr wrap="square" lIns="0" tIns="0" rIns="0" bIns="0" rtlCol="0" anchor="ctr"/>
           <a:lstStyle/>
           <a:p>
-            <a:pPr marL="0" indent="0" algn="ctr">
+            <a:pPr algn="ctr" indent="0" marL="0">
               <a:buNone/>
             </a:pPr>
             <a:r>
@@ -10764,7 +11128,7 @@
           <a:bodyPr wrap="square" lIns="0" tIns="0" rIns="0" bIns="0" rtlCol="0" anchor="t"/>
           <a:lstStyle/>
           <a:p>
-            <a:pPr marL="0" indent="0">
+            <a:pPr indent="0" marL="0">
               <a:buNone/>
             </a:pPr>
             <a:r>
@@ -10778,6 +11142,9 @@
               </a:rPr>
               <a:t>Mediator</a:t>
             </a:r>
+            <a:pPr indent="0" marL="0">
+              <a:buNone/>
+            </a:pPr>
             <a:r>
               <a:rPr lang="en-US" sz="1200" dirty="0">
                 <a:solidFill>
@@ -10789,14 +11156,17 @@
               </a:rPr>
               <a:t>  </a:t>
             </a:r>
+            <a:pPr indent="0" marL="0">
+              <a:buNone/>
+            </a:pPr>
             <a:r>
               <a:rPr lang="en-US" sz="1200" dirty="0">
                 <a:solidFill>
                   <a:srgbClr val="1A1A1A"/>
                 </a:solidFill>
-                <a:latin typeface="Consolas" pitchFamily="34" charset="0"/>
-                <a:ea typeface="Consolas" pitchFamily="34" charset="-122"/>
-                <a:cs typeface="Consolas" pitchFamily="34" charset="-120"/>
+                <a:latin typeface="Calibri" pitchFamily="34" charset="0"/>
+                <a:ea typeface="Calibri" pitchFamily="34" charset="-122"/>
+                <a:cs typeface="Calibri" pitchFamily="34" charset="-120"/>
               </a:rPr>
               <a:t>history クリア (closing 入場) / closingAborted=false / nextLoadingViewId 公開</a:t>
             </a:r>
@@ -10825,7 +11195,7 @@
           <a:bodyPr wrap="square" lIns="0" tIns="0" rIns="0" bIns="0" rtlCol="0" anchor="t"/>
           <a:lstStyle/>
           <a:p>
-            <a:pPr marL="0" indent="0">
+            <a:pPr indent="0" marL="0">
               <a:buNone/>
             </a:pPr>
             <a:endParaRPr lang="en-US" sz="1000" dirty="0"/>
@@ -10902,7 +11272,7 @@
           <a:bodyPr wrap="square" lIns="0" tIns="0" rIns="0" bIns="0" rtlCol="0" anchor="ctr"/>
           <a:lstStyle/>
           <a:p>
-            <a:pPr marL="0" indent="0" algn="ctr">
+            <a:pPr algn="ctr" indent="0" marL="0">
               <a:buNone/>
             </a:pPr>
             <a:r>
@@ -10966,7 +11336,7 @@
           <a:bodyPr wrap="square" lIns="0" tIns="0" rIns="0" bIns="0" rtlCol="0" anchor="t"/>
           <a:lstStyle/>
           <a:p>
-            <a:pPr marL="0" indent="0">
+            <a:pPr indent="0" marL="0">
               <a:buNone/>
             </a:pPr>
             <a:r>
@@ -10980,6 +11350,9 @@
               </a:rPr>
               <a:t>TransitionManager</a:t>
             </a:r>
+            <a:pPr indent="0" marL="0">
+              <a:buNone/>
+            </a:pPr>
             <a:r>
               <a:rPr lang="en-US" sz="1200" dirty="0">
                 <a:solidFill>
@@ -10991,14 +11364,17 @@
               </a:rPr>
               <a:t>  </a:t>
             </a:r>
+            <a:pPr indent="0" marL="0">
+              <a:buNone/>
+            </a:pPr>
             <a:r>
               <a:rPr lang="en-US" sz="1200" dirty="0">
                 <a:solidFill>
                   <a:srgbClr val="1A1A1A"/>
                 </a:solidFill>
-                <a:latin typeface="Consolas" pitchFamily="34" charset="0"/>
-                <a:ea typeface="Consolas" pitchFamily="34" charset="-122"/>
-                <a:cs typeface="Consolas" pitchFamily="34" charset="-120"/>
+                <a:latin typeface="Calibri" pitchFamily="34" charset="0"/>
+                <a:ea typeface="Calibri" pitchFamily="34" charset="-122"/>
+                <a:cs typeface="Calibri" pitchFamily="34" charset="-120"/>
               </a:rPr>
               <a:t>startTransition / sceneSourceB = ClosingScene.qml (cross-scene)</a:t>
             </a:r>
@@ -11027,7 +11403,7 @@
           <a:bodyPr wrap="square" lIns="0" tIns="0" rIns="0" bIns="0" rtlCol="0" anchor="t"/>
           <a:lstStyle/>
           <a:p>
-            <a:pPr marL="0" indent="0">
+            <a:pPr indent="0" marL="0">
               <a:buNone/>
             </a:pPr>
             <a:r>
@@ -11115,7 +11491,7 @@
           <a:bodyPr wrap="square" lIns="0" tIns="0" rIns="0" bIns="0" rtlCol="0" anchor="ctr"/>
           <a:lstStyle/>
           <a:p>
-            <a:pPr marL="0" indent="0" algn="ctr">
+            <a:pPr algn="ctr" indent="0" marL="0">
               <a:buNone/>
             </a:pPr>
             <a:r>
@@ -11179,7 +11555,7 @@
           <a:bodyPr wrap="square" lIns="0" tIns="0" rIns="0" bIns="0" rtlCol="0" anchor="t"/>
           <a:lstStyle/>
           <a:p>
-            <a:pPr marL="0" indent="0">
+            <a:pPr indent="0" marL="0">
               <a:buNone/>
             </a:pPr>
             <a:r>
@@ -11193,6 +11569,9 @@
               </a:rPr>
               <a:t>TransitionManager</a:t>
             </a:r>
+            <a:pPr indent="0" marL="0">
+              <a:buNone/>
+            </a:pPr>
             <a:r>
               <a:rPr lang="en-US" sz="1200" dirty="0">
                 <a:solidFill>
@@ -11204,14 +11583,17 @@
               </a:rPr>
               <a:t>  </a:t>
             </a:r>
+            <a:pPr indent="0" marL="0">
+              <a:buNone/>
+            </a:pPr>
             <a:r>
               <a:rPr lang="en-US" sz="1200" dirty="0">
                 <a:solidFill>
                   <a:srgbClr val="1A1A1A"/>
                 </a:solidFill>
-                <a:latin typeface="Consolas" pitchFamily="34" charset="0"/>
-                <a:ea typeface="Consolas" pitchFamily="34" charset="-122"/>
-                <a:cs typeface="Consolas" pitchFamily="34" charset="-120"/>
+                <a:latin typeface="Calibri" pitchFamily="34" charset="0"/>
+                <a:ea typeface="Calibri" pitchFamily="34" charset="-122"/>
+                <a:cs typeface="Calibri" pitchFamily="34" charset="-120"/>
               </a:rPr>
               <a:t>viewSlot 設定: closing 側 = Entering / home 側 = Leaving / Source ★最後</a:t>
             </a:r>
@@ -11240,7 +11622,7 @@
           <a:bodyPr wrap="square" lIns="0" tIns="0" rIns="0" bIns="0" rtlCol="0" anchor="t"/>
           <a:lstStyle/>
           <a:p>
-            <a:pPr marL="0" indent="0">
+            <a:pPr indent="0" marL="0">
               <a:buNone/>
             </a:pPr>
             <a:endParaRPr lang="en-US" sz="1000" dirty="0"/>
@@ -11317,7 +11699,7 @@
           <a:bodyPr wrap="square" lIns="0" tIns="0" rIns="0" bIns="0" rtlCol="0" anchor="ctr"/>
           <a:lstStyle/>
           <a:p>
-            <a:pPr marL="0" indent="0" algn="ctr">
+            <a:pPr algn="ctr" indent="0" marL="0">
               <a:buNone/>
             </a:pPr>
             <a:r>
@@ -11381,7 +11763,7 @@
           <a:bodyPr wrap="square" lIns="0" tIns="0" rIns="0" bIns="0" rtlCol="0" anchor="t"/>
           <a:lstStyle/>
           <a:p>
-            <a:pPr marL="0" indent="0">
+            <a:pPr indent="0" marL="0">
               <a:buNone/>
             </a:pPr>
             <a:r>
@@ -11395,6 +11777,9 @@
               </a:rPr>
               <a:t>HomeView (旧 NormalScene 内)</a:t>
             </a:r>
+            <a:pPr indent="0" marL="0">
+              <a:buNone/>
+            </a:pPr>
             <a:r>
               <a:rPr lang="en-US" sz="1200" dirty="0">
                 <a:solidFill>
@@ -11406,14 +11791,17 @@
               </a:rPr>
               <a:t>  </a:t>
             </a:r>
+            <a:pPr indent="0" marL="0">
+              <a:buNone/>
+            </a:pPr>
             <a:r>
               <a:rPr lang="en-US" sz="1200" dirty="0">
                 <a:solidFill>
                   <a:srgbClr val="1A1A1A"/>
                 </a:solidFill>
-                <a:latin typeface="Consolas" pitchFamily="34" charset="0"/>
-                <a:ea typeface="Consolas" pitchFamily="34" charset="-122"/>
-                <a:cs typeface="Consolas" pitchFamily="34" charset="-120"/>
+                <a:latin typeface="Calibri" pitchFamily="34" charset="0"/>
+                <a:ea typeface="Calibri" pitchFamily="34" charset="-122"/>
+                <a:cs typeface="Calibri" pitchFamily="34" charset="-120"/>
               </a:rPr>
               <a:t>myLifecycle=Leaving → leaveAnim.start</a:t>
             </a:r>
@@ -11442,7 +11830,7 @@
           <a:bodyPr wrap="square" lIns="0" tIns="0" rIns="0" bIns="0" rtlCol="0" anchor="t"/>
           <a:lstStyle/>
           <a:p>
-            <a:pPr marL="0" indent="0">
+            <a:pPr indent="0" marL="0">
               <a:buNone/>
             </a:pPr>
             <a:r>
@@ -11530,7 +11918,7 @@
           <a:bodyPr wrap="square" lIns="0" tIns="0" rIns="0" bIns="0" rtlCol="0" anchor="ctr"/>
           <a:lstStyle/>
           <a:p>
-            <a:pPr marL="0" indent="0" algn="ctr">
+            <a:pPr algn="ctr" indent="0" marL="0">
               <a:buNone/>
             </a:pPr>
             <a:r>
@@ -11594,7 +11982,7 @@
           <a:bodyPr wrap="square" lIns="0" tIns="0" rIns="0" bIns="0" rtlCol="0" anchor="t"/>
           <a:lstStyle/>
           <a:p>
-            <a:pPr marL="0" indent="0">
+            <a:pPr indent="0" marL="0">
               <a:buNone/>
             </a:pPr>
             <a:r>
@@ -11608,6 +11996,9 @@
               </a:rPr>
               <a:t>ClosingView (新 ClosingScene 内)</a:t>
             </a:r>
+            <a:pPr indent="0" marL="0">
+              <a:buNone/>
+            </a:pPr>
             <a:r>
               <a:rPr lang="en-US" sz="1200" dirty="0">
                 <a:solidFill>
@@ -11619,14 +12010,17 @@
               </a:rPr>
               <a:t>  </a:t>
             </a:r>
+            <a:pPr indent="0" marL="0">
+              <a:buNone/>
+            </a:pPr>
             <a:r>
               <a:rPr lang="en-US" sz="1200" dirty="0">
                 <a:solidFill>
                   <a:srgbClr val="1A1A1A"/>
                 </a:solidFill>
-                <a:latin typeface="Consolas" pitchFamily="34" charset="0"/>
-                <a:ea typeface="Consolas" pitchFamily="34" charset="-122"/>
-                <a:cs typeface="Consolas" pitchFamily="34" charset="-120"/>
+                <a:latin typeface="Calibri" pitchFamily="34" charset="0"/>
+                <a:ea typeface="Calibri" pitchFamily="34" charset="-122"/>
+                <a:cs typeface="Calibri" pitchFamily="34" charset="-120"/>
               </a:rPr>
               <a:t>performEnter (custom): opacity=1 即可視 / Qt.callLater(emitEnterComplete) / internalAnim.start (3s)</a:t>
             </a:r>
@@ -11655,7 +12049,7 @@
           <a:bodyPr wrap="square" lIns="0" tIns="0" rIns="0" bIns="0" rtlCol="0" anchor="t"/>
           <a:lstStyle/>
           <a:p>
-            <a:pPr marL="0" indent="0">
+            <a:pPr indent="0" marL="0">
               <a:buNone/>
             </a:pPr>
             <a:r>
@@ -11743,7 +12137,7 @@
           <a:bodyPr wrap="square" lIns="0" tIns="0" rIns="0" bIns="0" rtlCol="0" anchor="ctr"/>
           <a:lstStyle/>
           <a:p>
-            <a:pPr marL="0" indent="0" algn="ctr">
+            <a:pPr algn="ctr" indent="0" marL="0">
               <a:buNone/>
             </a:pPr>
             <a:r>
@@ -11807,7 +12201,7 @@
           <a:bodyPr wrap="square" lIns="0" tIns="0" rIns="0" bIns="0" rtlCol="0" anchor="t"/>
           <a:lstStyle/>
           <a:p>
-            <a:pPr marL="0" indent="0">
+            <a:pPr indent="0" marL="0">
               <a:buNone/>
             </a:pPr>
             <a:r>
@@ -11821,6 +12215,9 @@
               </a:rPr>
               <a:t>TransitionManager</a:t>
             </a:r>
+            <a:pPr indent="0" marL="0">
+              <a:buNone/>
+            </a:pPr>
             <a:r>
               <a:rPr lang="en-US" sz="1200" dirty="0">
                 <a:solidFill>
@@ -11832,14 +12229,17 @@
               </a:rPr>
               <a:t>  </a:t>
             </a:r>
+            <a:pPr indent="0" marL="0">
+              <a:buNone/>
+            </a:pPr>
             <a:r>
               <a:rPr lang="en-US" sz="1200" dirty="0">
                 <a:solidFill>
                   <a:srgbClr val="1A1A1A"/>
                 </a:solidFill>
-                <a:latin typeface="Consolas" pitchFamily="34" charset="0"/>
-                <a:ea typeface="Consolas" pitchFamily="34" charset="-122"/>
-                <a:cs typeface="Consolas" pitchFamily="34" charset="-120"/>
+                <a:latin typeface="Calibri" pitchFamily="34" charset="0"/>
+                <a:ea typeface="Calibri" pitchFamily="34" charset="-122"/>
+                <a:cs typeface="Calibri" pitchFamily="34" charset="-120"/>
               </a:rPr>
               <a:t>両完了 → finalizeTransition / NormalScene 解放 (sceneSourceA='')</a:t>
             </a:r>
@@ -11868,7 +12268,7 @@
           <a:bodyPr wrap="square" lIns="0" tIns="0" rIns="0" bIns="0" rtlCol="0" anchor="t"/>
           <a:lstStyle/>
           <a:p>
-            <a:pPr marL="0" indent="0">
+            <a:pPr indent="0" marL="0">
               <a:buNone/>
             </a:pPr>
             <a:endParaRPr lang="en-US" sz="1000" dirty="0"/>
@@ -11945,7 +12345,7 @@
           <a:bodyPr wrap="square" lIns="0" tIns="0" rIns="0" bIns="0" rtlCol="0" anchor="ctr"/>
           <a:lstStyle/>
           <a:p>
-            <a:pPr marL="0" indent="0" algn="ctr">
+            <a:pPr algn="ctr" indent="0" marL="0">
               <a:buNone/>
             </a:pPr>
             <a:r>
@@ -12009,7 +12409,7 @@
           <a:bodyPr wrap="square" lIns="0" tIns="0" rIns="0" bIns="0" rtlCol="0" anchor="t"/>
           <a:lstStyle/>
           <a:p>
-            <a:pPr marL="0" indent="0">
+            <a:pPr indent="0" marL="0">
               <a:buNone/>
             </a:pPr>
             <a:r>
@@ -12023,6 +12423,9 @@
               </a:rPr>
               <a:t>ClosingView (state=Idle)</a:t>
             </a:r>
+            <a:pPr indent="0" marL="0">
+              <a:buNone/>
+            </a:pPr>
             <a:r>
               <a:rPr lang="en-US" sz="1200" dirty="0">
                 <a:solidFill>
@@ -12034,14 +12437,17 @@
               </a:rPr>
               <a:t>  </a:t>
             </a:r>
+            <a:pPr indent="0" marL="0">
+              <a:buNone/>
+            </a:pPr>
             <a:r>
               <a:rPr lang="en-US" sz="1200" dirty="0">
                 <a:solidFill>
                   <a:srgbClr val="1A1A1A"/>
                 </a:solidFill>
-                <a:latin typeface="Consolas" pitchFamily="34" charset="0"/>
-                <a:ea typeface="Consolas" pitchFamily="34" charset="-122"/>
-                <a:cs typeface="Consolas" pitchFamily="34" charset="-120"/>
+                <a:latin typeface="Calibri" pitchFamily="34" charset="0"/>
+                <a:ea typeface="Calibri" pitchFamily="34" charset="-122"/>
+                <a:cs typeface="Calibri" pitchFamily="34" charset="-120"/>
               </a:rPr>
               <a:t>internalAnim 走行中。enabled=true なので BACK/HOME で中断可能 (slide 8)</a:t>
             </a:r>
@@ -12070,7 +12476,7 @@
           <a:bodyPr wrap="square" lIns="0" tIns="0" rIns="0" bIns="0" rtlCol="0" anchor="t"/>
           <a:lstStyle/>
           <a:p>
-            <a:pPr marL="0" indent="0">
+            <a:pPr indent="0" marL="0">
               <a:buNone/>
             </a:pPr>
             <a:r>
@@ -12109,7 +12515,7 @@
           <a:bodyPr wrap="square" lIns="0" tIns="0" rIns="0" bIns="0" rtlCol="0" anchor="ctr"/>
           <a:lstStyle/>
           <a:p>
-            <a:pPr marL="0" indent="0" algn="r">
+            <a:pPr algn="r" indent="0" marL="0">
               <a:buNone/>
             </a:pPr>
             <a:r>
@@ -12143,7 +12549,6 @@
         <a:solidFill>
           <a:srgbClr val="FFFFFF"/>
         </a:solidFill>
-        <a:effectLst/>
       </p:bgPr>
     </p:bg>
     <p:spTree>
@@ -12181,7 +12586,7 @@
           <a:bodyPr wrap="square" lIns="0" tIns="0" rIns="0" bIns="0" rtlCol="0" anchor="ctr"/>
           <a:lstStyle/>
           <a:p>
-            <a:pPr marL="0" indent="0">
+            <a:pPr indent="0" marL="0">
               <a:buNone/>
             </a:pPr>
             <a:r>
@@ -12220,7 +12625,7 @@
           <a:bodyPr wrap="square" lIns="0" tIns="0" rIns="0" bIns="0" rtlCol="0" anchor="ctr"/>
           <a:lstStyle/>
           <a:p>
-            <a:pPr marL="0" indent="0">
+            <a:pPr indent="0" marL="0">
               <a:buNone/>
             </a:pPr>
             <a:r>
@@ -12284,7 +12689,7 @@
           <a:bodyPr wrap="square" lIns="0" tIns="0" rIns="0" bIns="0" rtlCol="0" anchor="ctr"/>
           <a:lstStyle/>
           <a:p>
-            <a:pPr marL="0" indent="0" algn="ctr">
+            <a:pPr algn="ctr" indent="0" marL="0">
               <a:buNone/>
             </a:pPr>
             <a:r>
@@ -12348,7 +12753,7 @@
           <a:bodyPr wrap="square" lIns="0" tIns="0" rIns="0" bIns="0" rtlCol="0" anchor="t"/>
           <a:lstStyle/>
           <a:p>
-            <a:pPr marL="0" indent="0">
+            <a:pPr indent="0" marL="0">
               <a:buNone/>
             </a:pPr>
             <a:r>
@@ -12362,6 +12767,9 @@
               </a:rPr>
               <a:t>User</a:t>
             </a:r>
+            <a:pPr indent="0" marL="0">
+              <a:buNone/>
+            </a:pPr>
             <a:r>
               <a:rPr lang="en-US" sz="1200" dirty="0">
                 <a:solidFill>
@@ -12373,14 +12781,17 @@
               </a:rPr>
               <a:t>  </a:t>
             </a:r>
+            <a:pPr indent="0" marL="0">
+              <a:buNone/>
+            </a:pPr>
             <a:r>
               <a:rPr lang="en-US" sz="1200" dirty="0">
                 <a:solidFill>
                   <a:srgbClr val="1A1A1A"/>
                 </a:solidFill>
-                <a:latin typeface="Consolas" pitchFamily="34" charset="0"/>
-                <a:ea typeface="Consolas" pitchFamily="34" charset="-122"/>
-                <a:cs typeface="Consolas" pitchFamily="34" charset="-120"/>
+                <a:latin typeface="Calibri" pitchFamily="34" charset="0"/>
+                <a:ea typeface="Calibri" pitchFamily="34" charset="-122"/>
+                <a:cs typeface="Calibri" pitchFamily="34" charset="-120"/>
               </a:rPr>
               <a:t>BACK(C) PRESS/RELEASE/CLICK</a:t>
             </a:r>
@@ -12409,7 +12820,7 @@
           <a:bodyPr wrap="square" lIns="0" tIns="0" rIns="0" bIns="0" rtlCol="0" anchor="t"/>
           <a:lstStyle/>
           <a:p>
-            <a:pPr marL="0" indent="0">
+            <a:pPr indent="0" marL="0">
               <a:buNone/>
             </a:pPr>
             <a:r>
@@ -12497,7 +12908,7 @@
           <a:bodyPr wrap="square" lIns="0" tIns="0" rIns="0" bIns="0" rtlCol="0" anchor="ctr"/>
           <a:lstStyle/>
           <a:p>
-            <a:pPr marL="0" indent="0" algn="ctr">
+            <a:pPr algn="ctr" indent="0" marL="0">
               <a:buNone/>
             </a:pPr>
             <a:r>
@@ -12561,7 +12972,7 @@
           <a:bodyPr wrap="square" lIns="0" tIns="0" rIns="0" bIns="0" rtlCol="0" anchor="t"/>
           <a:lstStyle/>
           <a:p>
-            <a:pPr marL="0" indent="0">
+            <a:pPr indent="0" marL="0">
               <a:buNone/>
             </a:pPr>
             <a:r>
@@ -12575,6 +12986,9 @@
               </a:rPr>
               <a:t>ClosingScene</a:t>
             </a:r>
+            <a:pPr indent="0" marL="0">
+              <a:buNone/>
+            </a:pPr>
             <a:r>
               <a:rPr lang="en-US" sz="1200" dirty="0">
                 <a:solidFill>
@@ -12586,14 +13000,17 @@
               </a:rPr>
               <a:t>  </a:t>
             </a:r>
+            <a:pPr indent="0" marL="0">
+              <a:buNone/>
+            </a:pPr>
             <a:r>
               <a:rPr lang="en-US" sz="1200" dirty="0">
                 <a:solidFill>
                   <a:srgbClr val="1A1A1A"/>
                 </a:solidFill>
-                <a:latin typeface="Consolas" pitchFamily="34" charset="0"/>
-                <a:ea typeface="Consolas" pitchFamily="34" charset="-122"/>
-                <a:cs typeface="Consolas" pitchFamily="34" charset="-120"/>
+                <a:latin typeface="Calibri" pitchFamily="34" charset="0"/>
+                <a:ea typeface="Calibri" pitchFamily="34" charset="-122"/>
+                <a:cs typeface="Calibri" pitchFamily="34" charset="-120"/>
               </a:rPr>
               <a:t>handleAbsorb(BACK, CLICK) → true (中断手順開始)</a:t>
             </a:r>
@@ -12622,7 +13039,7 @@
           <a:bodyPr wrap="square" lIns="0" tIns="0" rIns="0" bIns="0" rtlCol="0" anchor="t"/>
           <a:lstStyle/>
           <a:p>
-            <a:pPr marL="0" indent="0">
+            <a:pPr indent="0" marL="0">
               <a:buNone/>
             </a:pPr>
             <a:endParaRPr lang="en-US" sz="1000" dirty="0"/>
@@ -12699,7 +13116,7 @@
           <a:bodyPr wrap="square" lIns="0" tIns="0" rIns="0" bIns="0" rtlCol="0" anchor="ctr"/>
           <a:lstStyle/>
           <a:p>
-            <a:pPr marL="0" indent="0" algn="ctr">
+            <a:pPr algn="ctr" indent="0" marL="0">
               <a:buNone/>
             </a:pPr>
             <a:r>
@@ -12763,7 +13180,7 @@
           <a:bodyPr wrap="square" lIns="0" tIns="0" rIns="0" bIns="0" rtlCol="0" anchor="t"/>
           <a:lstStyle/>
           <a:p>
-            <a:pPr marL="0" indent="0">
+            <a:pPr indent="0" marL="0">
               <a:buNone/>
             </a:pPr>
             <a:r>
@@ -12777,6 +13194,9 @@
               </a:rPr>
               <a:t>ClosingScene</a:t>
             </a:r>
+            <a:pPr indent="0" marL="0">
+              <a:buNone/>
+            </a:pPr>
             <a:r>
               <a:rPr lang="en-US" sz="1200" dirty="0">
                 <a:solidFill>
@@ -12788,14 +13208,17 @@
               </a:rPr>
               <a:t>  </a:t>
             </a:r>
+            <a:pPr indent="0" marL="0">
+              <a:buNone/>
+            </a:pPr>
             <a:r>
               <a:rPr lang="en-US" sz="1200" dirty="0">
                 <a:solidFill>
                   <a:srgbClr val="1A1A1A"/>
                 </a:solidFill>
-                <a:latin typeface="Consolas" pitchFamily="34" charset="0"/>
-                <a:ea typeface="Consolas" pitchFamily="34" charset="-122"/>
-                <a:cs typeface="Consolas" pitchFamily="34" charset="-120"/>
+                <a:latin typeface="Calibri" pitchFamily="34" charset="0"/>
+                <a:ea typeface="Calibri" pitchFamily="34" charset="-122"/>
+                <a:cs typeface="Calibri" pitchFamily="34" charset="-120"/>
               </a:rPr>
               <a:t>Mediator.closingAborted = true   ① 自然完了側を抑止</a:t>
             </a:r>
@@ -12824,7 +13247,7 @@
           <a:bodyPr wrap="square" lIns="0" tIns="0" rIns="0" bIns="0" rtlCol="0" anchor="t"/>
           <a:lstStyle/>
           <a:p>
-            <a:pPr marL="0" indent="0">
+            <a:pPr indent="0" marL="0">
               <a:buNone/>
             </a:pPr>
             <a:r>
@@ -12912,7 +13335,7 @@
           <a:bodyPr wrap="square" lIns="0" tIns="0" rIns="0" bIns="0" rtlCol="0" anchor="ctr"/>
           <a:lstStyle/>
           <a:p>
-            <a:pPr marL="0" indent="0" algn="ctr">
+            <a:pPr algn="ctr" indent="0" marL="0">
               <a:buNone/>
             </a:pPr>
             <a:r>
@@ -12976,7 +13399,7 @@
           <a:bodyPr wrap="square" lIns="0" tIns="0" rIns="0" bIns="0" rtlCol="0" anchor="t"/>
           <a:lstStyle/>
           <a:p>
-            <a:pPr marL="0" indent="0">
+            <a:pPr indent="0" marL="0">
               <a:buNone/>
             </a:pPr>
             <a:r>
@@ -12990,6 +13413,9 @@
               </a:rPr>
               <a:t>ClosingScene</a:t>
             </a:r>
+            <a:pPr indent="0" marL="0">
+              <a:buNone/>
+            </a:pPr>
             <a:r>
               <a:rPr lang="en-US" sz="1200" dirty="0">
                 <a:solidFill>
@@ -13001,14 +13427,17 @@
               </a:rPr>
               <a:t>  </a:t>
             </a:r>
+            <a:pPr indent="0" marL="0">
+              <a:buNone/>
+            </a:pPr>
             <a:r>
               <a:rPr lang="en-US" sz="1200" dirty="0">
                 <a:solidFill>
                   <a:srgbClr val="1A1A1A"/>
                 </a:solidFill>
-                <a:latin typeface="Consolas" pitchFamily="34" charset="0"/>
-                <a:ea typeface="Consolas" pitchFamily="34" charset="-122"/>
-                <a:cs typeface="Consolas" pitchFamily="34" charset="-120"/>
+                <a:latin typeface="Calibri" pitchFamily="34" charset="0"/>
+                <a:ea typeface="Calibri" pitchFamily="34" charset="-122"/>
+                <a:cs typeface="Calibri" pitchFamily="34" charset="-120"/>
               </a:rPr>
               <a:t>TransitionManager.forceUnloadCurrentView()   ② current 強制アンロード</a:t>
             </a:r>
@@ -13037,7 +13466,7 @@
           <a:bodyPr wrap="square" lIns="0" tIns="0" rIns="0" bIns="0" rtlCol="0" anchor="t"/>
           <a:lstStyle/>
           <a:p>
-            <a:pPr marL="0" indent="0">
+            <a:pPr indent="0" marL="0">
               <a:buNone/>
             </a:pPr>
             <a:r>
@@ -13125,7 +13554,7 @@
           <a:bodyPr wrap="square" lIns="0" tIns="0" rIns="0" bIns="0" rtlCol="0" anchor="ctr"/>
           <a:lstStyle/>
           <a:p>
-            <a:pPr marL="0" indent="0" algn="ctr">
+            <a:pPr algn="ctr" indent="0" marL="0">
               <a:buNone/>
             </a:pPr>
             <a:r>
@@ -13189,7 +13618,7 @@
           <a:bodyPr wrap="square" lIns="0" tIns="0" rIns="0" bIns="0" rtlCol="0" anchor="t"/>
           <a:lstStyle/>
           <a:p>
-            <a:pPr marL="0" indent="0">
+            <a:pPr indent="0" marL="0">
               <a:buNone/>
             </a:pPr>
             <a:r>
@@ -13203,6 +13632,9 @@
               </a:rPr>
               <a:t>ClosingScene</a:t>
             </a:r>
+            <a:pPr indent="0" marL="0">
+              <a:buNone/>
+            </a:pPr>
             <a:r>
               <a:rPr lang="en-US" sz="1200" dirty="0">
                 <a:solidFill>
@@ -13214,16 +13646,19 @@
               </a:rPr>
               <a:t>  </a:t>
             </a:r>
+            <a:pPr indent="0" marL="0">
+              <a:buNone/>
+            </a:pPr>
             <a:r>
               <a:rPr lang="en-US" sz="1200" dirty="0">
                 <a:solidFill>
                   <a:srgbClr val="1A1A1A"/>
                 </a:solidFill>
-                <a:latin typeface="Consolas" pitchFamily="34" charset="0"/>
-                <a:ea typeface="Consolas" pitchFamily="34" charset="-122"/>
-                <a:cs typeface="Consolas" pitchFamily="34" charset="-120"/>
-              </a:rPr>
-              <a:t>Mediator.requestNavigate(idNormalHome, Back)   ③ 新規遷移</a:t>
+                <a:latin typeface="Calibri" pitchFamily="34" charset="0"/>
+                <a:ea typeface="Calibri" pitchFamily="34" charset="-122"/>
+                <a:cs typeface="Calibri" pitchFamily="34" charset="-120"/>
+              </a:rPr>
+              <a:t>Mediator.requestNavigate(ViewId.NormalHome, Back)   ③ 新規遷移</a:t>
             </a:r>
             <a:endParaRPr lang="en-US" sz="1200" dirty="0"/>
           </a:p>
@@ -13250,7 +13685,7 @@
           <a:bodyPr wrap="square" lIns="0" tIns="0" rIns="0" bIns="0" rtlCol="0" anchor="t"/>
           <a:lstStyle/>
           <a:p>
-            <a:pPr marL="0" indent="0">
+            <a:pPr indent="0" marL="0">
               <a:buNone/>
             </a:pPr>
             <a:r>
@@ -13338,7 +13773,7 @@
           <a:bodyPr wrap="square" lIns="0" tIns="0" rIns="0" bIns="0" rtlCol="0" anchor="ctr"/>
           <a:lstStyle/>
           <a:p>
-            <a:pPr marL="0" indent="0" algn="ctr">
+            <a:pPr algn="ctr" indent="0" marL="0">
               <a:buNone/>
             </a:pPr>
             <a:r>
@@ -13402,7 +13837,7 @@
           <a:bodyPr wrap="square" lIns="0" tIns="0" rIns="0" bIns="0" rtlCol="0" anchor="t"/>
           <a:lstStyle/>
           <a:p>
-            <a:pPr marL="0" indent="0">
+            <a:pPr indent="0" marL="0">
               <a:buNone/>
             </a:pPr>
             <a:r>
@@ -13416,6 +13851,9 @@
               </a:rPr>
               <a:t>TransitionManager</a:t>
             </a:r>
+            <a:pPr indent="0" marL="0">
+              <a:buNone/>
+            </a:pPr>
             <a:r>
               <a:rPr lang="en-US" sz="1200" dirty="0">
                 <a:solidFill>
@@ -13427,14 +13865,17 @@
               </a:rPr>
               <a:t>  </a:t>
             </a:r>
+            <a:pPr indent="0" marL="0">
+              <a:buNone/>
+            </a:pPr>
             <a:r>
               <a:rPr lang="en-US" sz="1200" dirty="0">
                 <a:solidFill>
                   <a:srgbClr val="1A1A1A"/>
                 </a:solidFill>
-                <a:latin typeface="Consolas" pitchFamily="34" charset="0"/>
-                <a:ea typeface="Consolas" pitchFamily="34" charset="-122"/>
-                <a:cs typeface="Consolas" pitchFamily="34" charset="-120"/>
+                <a:latin typeface="Calibri" pitchFamily="34" charset="0"/>
+                <a:ea typeface="Calibri" pitchFamily="34" charset="-122"/>
+                <a:cs typeface="Calibri" pitchFamily="34" charset="-120"/>
               </a:rPr>
               <a:t>startTransition: hasLeavingView=false (forceUnload 直後で空)</a:t>
             </a:r>
@@ -13463,7 +13904,7 @@
           <a:bodyPr wrap="square" lIns="0" tIns="0" rIns="0" bIns="0" rtlCol="0" anchor="t"/>
           <a:lstStyle/>
           <a:p>
-            <a:pPr marL="0" indent="0">
+            <a:pPr indent="0" marL="0">
               <a:buNone/>
             </a:pPr>
             <a:r>
@@ -13551,7 +13992,7 @@
           <a:bodyPr wrap="square" lIns="0" tIns="0" rIns="0" bIns="0" rtlCol="0" anchor="ctr"/>
           <a:lstStyle/>
           <a:p>
-            <a:pPr marL="0" indent="0" algn="ctr">
+            <a:pPr algn="ctr" indent="0" marL="0">
               <a:buNone/>
             </a:pPr>
             <a:r>
@@ -13615,7 +14056,7 @@
           <a:bodyPr wrap="square" lIns="0" tIns="0" rIns="0" bIns="0" rtlCol="0" anchor="t"/>
           <a:lstStyle/>
           <a:p>
-            <a:pPr marL="0" indent="0">
+            <a:pPr indent="0" marL="0">
               <a:buNone/>
             </a:pPr>
             <a:r>
@@ -13629,6 +14070,9 @@
               </a:rPr>
               <a:t>HomeView 新規ロード</a:t>
             </a:r>
+            <a:pPr indent="0" marL="0">
+              <a:buNone/>
+            </a:pPr>
             <a:r>
               <a:rPr lang="en-US" sz="1200" dirty="0">
                 <a:solidFill>
@@ -13640,14 +14084,17 @@
               </a:rPr>
               <a:t>  </a:t>
             </a:r>
+            <a:pPr indent="0" marL="0">
+              <a:buNone/>
+            </a:pPr>
             <a:r>
               <a:rPr lang="en-US" sz="1200" dirty="0">
                 <a:solidFill>
                   <a:srgbClr val="1A1A1A"/>
                 </a:solidFill>
-                <a:latin typeface="Consolas" pitchFamily="34" charset="0"/>
-                <a:ea typeface="Consolas" pitchFamily="34" charset="-122"/>
-                <a:cs typeface="Consolas" pitchFamily="34" charset="-120"/>
+                <a:latin typeface="Calibri" pitchFamily="34" charset="0"/>
+                <a:ea typeface="Calibri" pitchFamily="34" charset="-122"/>
+                <a:cs typeface="Calibri" pitchFamily="34" charset="-120"/>
               </a:rPr>
               <a:t>performEnter → enterAnim</a:t>
             </a:r>
@@ -13676,7 +14123,7 @@
           <a:bodyPr wrap="square" lIns="0" tIns="0" rIns="0" bIns="0" rtlCol="0" anchor="t"/>
           <a:lstStyle/>
           <a:p>
-            <a:pPr marL="0" indent="0">
+            <a:pPr indent="0" marL="0">
               <a:buNone/>
             </a:pPr>
             <a:r>
@@ -13764,7 +14211,7 @@
           <a:bodyPr wrap="square" lIns="0" tIns="0" rIns="0" bIns="0" rtlCol="0" anchor="ctr"/>
           <a:lstStyle/>
           <a:p>
-            <a:pPr marL="0" indent="0" algn="ctr">
+            <a:pPr algn="ctr" indent="0" marL="0">
               <a:buNone/>
             </a:pPr>
             <a:r>
@@ -13828,7 +14275,7 @@
           <a:bodyPr wrap="square" lIns="0" tIns="0" rIns="0" bIns="0" rtlCol="0" anchor="t"/>
           <a:lstStyle/>
           <a:p>
-            <a:pPr marL="0" indent="0">
+            <a:pPr indent="0" marL="0">
               <a:buNone/>
             </a:pPr>
             <a:r>
@@ -13842,6 +14289,9 @@
               </a:rPr>
               <a:t>TransitionManager</a:t>
             </a:r>
+            <a:pPr indent="0" marL="0">
+              <a:buNone/>
+            </a:pPr>
             <a:r>
               <a:rPr lang="en-US" sz="1200" dirty="0">
                 <a:solidFill>
@@ -13853,14 +14303,17 @@
               </a:rPr>
               <a:t>  </a:t>
             </a:r>
+            <a:pPr indent="0" marL="0">
+              <a:buNone/>
+            </a:pPr>
             <a:r>
               <a:rPr lang="en-US" sz="1200" dirty="0">
                 <a:solidFill>
                   <a:srgbClr val="1A1A1A"/>
                 </a:solidFill>
-                <a:latin typeface="Consolas" pitchFamily="34" charset="0"/>
-                <a:ea typeface="Consolas" pitchFamily="34" charset="-122"/>
-                <a:cs typeface="Consolas" pitchFamily="34" charset="-120"/>
+                <a:latin typeface="Calibri" pitchFamily="34" charset="0"/>
+                <a:ea typeface="Calibri" pitchFamily="34" charset="-122"/>
+                <a:cs typeface="Calibri" pitchFamily="34" charset="-120"/>
               </a:rPr>
               <a:t>finalizeTransition / ClosingScene 解放 (sceneSourceB='')</a:t>
             </a:r>
@@ -13889,7 +14342,7 @@
           <a:bodyPr wrap="square" lIns="0" tIns="0" rIns="0" bIns="0" rtlCol="0" anchor="t"/>
           <a:lstStyle/>
           <a:p>
-            <a:pPr marL="0" indent="0">
+            <a:pPr indent="0" marL="0">
               <a:buNone/>
             </a:pPr>
             <a:r>
@@ -13928,7 +14381,7 @@
           <a:bodyPr wrap="square" lIns="0" tIns="0" rIns="0" bIns="0" rtlCol="0" anchor="ctr"/>
           <a:lstStyle/>
           <a:p>
-            <a:pPr marL="0" indent="0" algn="r">
+            <a:pPr algn="r" indent="0" marL="0">
               <a:buNone/>
             </a:pPr>
             <a:r>
@@ -13962,7 +14415,6 @@
         <a:solidFill>
           <a:srgbClr val="FFFFFF"/>
         </a:solidFill>
-        <a:effectLst/>
       </p:bgPr>
     </p:bg>
     <p:spTree>
@@ -14000,7 +14452,7 @@
           <a:bodyPr wrap="square" lIns="0" tIns="0" rIns="0" bIns="0" rtlCol="0" anchor="ctr"/>
           <a:lstStyle/>
           <a:p>
-            <a:pPr marL="0" indent="0">
+            <a:pPr indent="0" marL="0">
               <a:buNone/>
             </a:pPr>
             <a:r>
@@ -14039,7 +14491,7 @@
           <a:bodyPr wrap="square" lIns="0" tIns="0" rIns="0" bIns="0" rtlCol="0" anchor="ctr"/>
           <a:lstStyle/>
           <a:p>
-            <a:pPr marL="0" indent="0">
+            <a:pPr indent="0" marL="0">
               <a:buNone/>
             </a:pPr>
             <a:r>
@@ -14128,7 +14580,7 @@
           <a:bodyPr wrap="square" lIns="0" tIns="0" rIns="0" bIns="0" rtlCol="0" anchor="ctr"/>
           <a:lstStyle/>
           <a:p>
-            <a:pPr marL="0" indent="0">
+            <a:pPr indent="0" marL="0">
               <a:buNone/>
             </a:pPr>
             <a:r>
@@ -14140,7 +14592,7 @@
                 <a:ea typeface="Calibri" pitchFamily="34" charset="-122"/>
                 <a:cs typeface="Calibri" pitchFamily="34" charset="-120"/>
               </a:rPr>
-              <a:t>① Mediator.requestNavigate(idNormalSample2a)</a:t>
+              <a:t>① Mediator.requestNavigate(ViewId.NormalSample2a)</a:t>
             </a:r>
             <a:endParaRPr lang="en-US" sz="1200" dirty="0"/>
           </a:p>
@@ -14167,7 +14619,7 @@
           <a:bodyPr wrap="square" lIns="0" tIns="0" rIns="0" bIns="0" rtlCol="0" anchor="t"/>
           <a:lstStyle/>
           <a:p>
-            <a:pPr marL="0" indent="0">
+            <a:pPr indent="0" marL="0">
               <a:buNone/>
             </a:pPr>
             <a:r>
@@ -14179,7 +14631,7 @@
                 <a:ea typeface="Calibri" pitchFamily="34" charset="-122"/>
                 <a:cs typeface="Calibri" pitchFamily="34" charset="-120"/>
               </a:rPr>
-              <a:t>nextLoadingViewId = idNormalSample2a を先行公開</a:t>
+              <a:t>nextLoadingViewId = ViewId.NormalSample2a を先行公開</a:t>
             </a:r>
             <a:endParaRPr lang="en-US" sz="1000" dirty="0"/>
           </a:p>
@@ -14256,7 +14708,7 @@
           <a:bodyPr wrap="square" lIns="0" tIns="0" rIns="0" bIns="0" rtlCol="0" anchor="ctr"/>
           <a:lstStyle/>
           <a:p>
-            <a:pPr marL="0" indent="0">
+            <a:pPr indent="0" marL="0">
               <a:buNone/>
             </a:pPr>
             <a:r>
@@ -14268,7 +14720,7 @@
                 <a:ea typeface="Calibri" pitchFamily="34" charset="-122"/>
                 <a:cs typeface="Calibri" pitchFamily="34" charset="-120"/>
               </a:rPr>
-              <a:t>② NavigationTable.viewFileOf(idNormalSample2a)</a:t>
+              <a:t>② ViewId.fileOf(ViewId.NormalSample2a)</a:t>
             </a:r>
             <a:endParaRPr lang="en-US" sz="1200" dirty="0"/>
           </a:p>
@@ -14295,7 +14747,7 @@
           <a:bodyPr wrap="square" lIns="0" tIns="0" rIns="0" bIns="0" rtlCol="0" anchor="t"/>
           <a:lstStyle/>
           <a:p>
-            <a:pPr marL="0" indent="0">
+            <a:pPr indent="0" marL="0">
               <a:buNone/>
             </a:pPr>
             <a:r>
@@ -14307,7 +14759,7 @@
                 <a:ea typeface="Calibri" pitchFamily="34" charset="-122"/>
                 <a:cs typeface="Calibri" pitchFamily="34" charset="-120"/>
               </a:rPr>
-              <a:t>→ "Sample2View.qml" (= idNormalSample2b と同じ)</a:t>
+              <a:t>→ "Sample2View.qml" (= ViewId.NormalSample2b と同じ)</a:t>
             </a:r>
             <a:endParaRPr lang="en-US" sz="1000" dirty="0"/>
           </a:p>
@@ -14384,7 +14836,7 @@
           <a:bodyPr wrap="square" lIns="0" tIns="0" rIns="0" bIns="0" rtlCol="0" anchor="ctr"/>
           <a:lstStyle/>
           <a:p>
-            <a:pPr marL="0" indent="0">
+            <a:pPr indent="0" marL="0">
               <a:buNone/>
             </a:pPr>
             <a:r>
@@ -14423,7 +14875,7 @@
           <a:bodyPr wrap="square" lIns="0" tIns="0" rIns="0" bIns="0" rtlCol="0" anchor="t"/>
           <a:lstStyle/>
           <a:p>
-            <a:pPr marL="0" indent="0">
+            <a:pPr indent="0" marL="0">
               <a:buNone/>
             </a:pPr>
             <a:r>
@@ -14512,7 +14964,7 @@
           <a:bodyPr wrap="square" lIns="0" tIns="0" rIns="0" bIns="0" rtlCol="0" anchor="ctr"/>
           <a:lstStyle/>
           <a:p>
-            <a:pPr marL="0" indent="0">
+            <a:pPr indent="0" marL="0">
               <a:buNone/>
             </a:pPr>
             <a:r>
@@ -14551,7 +15003,7 @@
           <a:bodyPr wrap="square" lIns="0" tIns="0" rIns="0" bIns="0" rtlCol="0" anchor="t"/>
           <a:lstStyle/>
           <a:p>
-            <a:pPr marL="0" indent="0">
+            <a:pPr indent="0" marL="0">
               <a:buNone/>
             </a:pPr>
             <a:r>
@@ -14568,7 +15020,7 @@
             <a:endParaRPr lang="en-US" sz="1000" dirty="0"/>
           </a:p>
           <a:p>
-            <a:pPr marL="0" indent="0">
+            <a:pPr indent="0" marL="0">
               <a:buNone/>
             </a:pPr>
             <a:r>
@@ -14580,7 +15032,7 @@
                 <a:ea typeface="Calibri" pitchFamily="34" charset="-122"/>
                 <a:cs typeface="Calibri" pitchFamily="34" charset="-120"/>
               </a:rPr>
-              <a:t>→ thisViewId = idNormalSample2a に確定</a:t>
+              <a:t>→ thisViewId = ViewId.NormalSample2a に確定</a:t>
             </a:r>
             <a:endParaRPr lang="en-US" sz="1000" dirty="0"/>
           </a:p>
@@ -14657,7 +15109,7 @@
           <a:bodyPr wrap="square" lIns="0" tIns="0" rIns="0" bIns="0" rtlCol="0" anchor="ctr"/>
           <a:lstStyle/>
           <a:p>
-            <a:pPr marL="0" indent="0">
+            <a:pPr indent="0" marL="0">
               <a:buNone/>
             </a:pPr>
             <a:r>
@@ -14696,7 +15148,7 @@
           <a:bodyPr wrap="square" lIns="0" tIns="0" rIns="0" bIns="0" rtlCol="0" anchor="t"/>
           <a:lstStyle/>
           <a:p>
-            <a:pPr marL="0" indent="0">
+            <a:pPr indent="0" marL="0">
               <a:buNone/>
             </a:pPr>
             <a:r>
@@ -14760,7 +15212,7 @@
           <a:bodyPr wrap="square" lIns="0" tIns="0" rIns="0" bIns="0" rtlCol="0" anchor="ctr"/>
           <a:lstStyle/>
           <a:p>
-            <a:pPr marL="0" indent="0">
+            <a:pPr indent="0" marL="0">
               <a:buNone/>
             </a:pPr>
             <a:r>
@@ -14799,7 +15251,7 @@
           <a:bodyPr wrap="square" lIns="0" tIns="0" rIns="0" bIns="0" rtlCol="0" anchor="t"/>
           <a:lstStyle/>
           <a:p>
-            <a:pPr marL="0" indent="0">
+            <a:pPr indent="0" marL="0">
               <a:buNone/>
             </a:pPr>
             <a:r>
@@ -14807,16 +15259,16 @@
                 <a:solidFill>
                   <a:srgbClr val="CADCFC"/>
                 </a:solidFill>
-                <a:latin typeface="Consolas" pitchFamily="34" charset="0"/>
-                <a:ea typeface="Consolas" pitchFamily="34" charset="-122"/>
-                <a:cs typeface="Consolas" pitchFamily="34" charset="-120"/>
+                <a:latin typeface="Calibri" pitchFamily="34" charset="0"/>
+                <a:ea typeface="Calibri" pitchFamily="34" charset="-122"/>
+                <a:cs typeface="Calibri" pitchFamily="34" charset="-120"/>
               </a:rPr>
               <a:t>ViewBase {</a:t>
             </a:r>
             <a:endParaRPr lang="en-US" sz="1000" dirty="0"/>
           </a:p>
           <a:p>
-            <a:pPr marL="0" indent="0">
+            <a:pPr indent="0" marL="0">
               <a:buNone/>
             </a:pPr>
             <a:r>
@@ -14824,16 +15276,16 @@
                 <a:solidFill>
                   <a:srgbClr val="CADCFC"/>
                 </a:solidFill>
-                <a:latin typeface="Consolas" pitchFamily="34" charset="0"/>
-                <a:ea typeface="Consolas" pitchFamily="34" charset="-122"/>
-                <a:cs typeface="Consolas" pitchFamily="34" charset="-120"/>
+                <a:latin typeface="Calibri" pitchFamily="34" charset="0"/>
+                <a:ea typeface="Calibri" pitchFamily="34" charset="-122"/>
+                <a:cs typeface="Calibri" pitchFamily="34" charset="-120"/>
               </a:rPr>
               <a:t>    // thisViewId を明示しない</a:t>
             </a:r>
             <a:endParaRPr lang="en-US" sz="1000" dirty="0"/>
           </a:p>
           <a:p>
-            <a:pPr marL="0" indent="0">
+            <a:pPr indent="0" marL="0">
               <a:buNone/>
             </a:pPr>
             <a:r>
@@ -14841,16 +15293,16 @@
                 <a:solidFill>
                   <a:srgbClr val="CADCFC"/>
                 </a:solidFill>
-                <a:latin typeface="Consolas" pitchFamily="34" charset="0"/>
-                <a:ea typeface="Consolas" pitchFamily="34" charset="-122"/>
-                <a:cs typeface="Consolas" pitchFamily="34" charset="-120"/>
+                <a:latin typeface="Calibri" pitchFamily="34" charset="0"/>
+                <a:ea typeface="Calibri" pitchFamily="34" charset="-122"/>
+                <a:cs typeface="Calibri" pitchFamily="34" charset="-120"/>
               </a:rPr>
               <a:t>    // → ViewBase の Component.onCompleted で</a:t>
             </a:r>
             <a:endParaRPr lang="en-US" sz="1000" dirty="0"/>
           </a:p>
           <a:p>
-            <a:pPr marL="0" indent="0">
+            <a:pPr indent="0" marL="0">
               <a:buNone/>
             </a:pPr>
             <a:r>
@@ -14858,22 +15310,22 @@
                 <a:solidFill>
                   <a:srgbClr val="CADCFC"/>
                 </a:solidFill>
-                <a:latin typeface="Consolas" pitchFamily="34" charset="0"/>
-                <a:ea typeface="Consolas" pitchFamily="34" charset="-122"/>
-                <a:cs typeface="Consolas" pitchFamily="34" charset="-120"/>
+                <a:latin typeface="Calibri" pitchFamily="34" charset="0"/>
+                <a:ea typeface="Calibri" pitchFamily="34" charset="-122"/>
+                <a:cs typeface="Calibri" pitchFamily="34" charset="-120"/>
               </a:rPr>
               <a:t>    //   Mediator.nextLoadingViewId から動的取得</a:t>
             </a:r>
             <a:endParaRPr lang="en-US" sz="1000" dirty="0"/>
           </a:p>
           <a:p>
-            <a:pPr marL="0" indent="0">
+            <a:pPr indent="0" marL="0">
               <a:buNone/>
             </a:pPr>
             <a:endParaRPr lang="en-US" sz="1000" dirty="0"/>
           </a:p>
           <a:p>
-            <a:pPr marL="0" indent="0">
+            <a:pPr indent="0" marL="0">
               <a:buNone/>
             </a:pPr>
             <a:r>
@@ -14881,16 +15333,16 @@
                 <a:solidFill>
                   <a:srgbClr val="CADCFC"/>
                 </a:solidFill>
-                <a:latin typeface="Consolas" pitchFamily="34" charset="0"/>
-                <a:ea typeface="Consolas" pitchFamily="34" charset="-122"/>
-                <a:cs typeface="Consolas" pitchFamily="34" charset="-120"/>
+                <a:latin typeface="Calibri" pitchFamily="34" charset="0"/>
+                <a:ea typeface="Calibri" pitchFamily="34" charset="-122"/>
+                <a:cs typeface="Calibri" pitchFamily="34" charset="-120"/>
               </a:rPr>
               <a:t>    readonly property bool isVariantA:</a:t>
             </a:r>
             <a:endParaRPr lang="en-US" sz="1000" dirty="0"/>
           </a:p>
           <a:p>
-            <a:pPr marL="0" indent="0">
+            <a:pPr indent="0" marL="0">
               <a:buNone/>
             </a:pPr>
             <a:r>
@@ -14898,16 +15350,16 @@
                 <a:solidFill>
                   <a:srgbClr val="CADCFC"/>
                 </a:solidFill>
-                <a:latin typeface="Consolas" pitchFamily="34" charset="0"/>
-                <a:ea typeface="Consolas" pitchFamily="34" charset="-122"/>
-                <a:cs typeface="Consolas" pitchFamily="34" charset="-120"/>
-              </a:rPr>
-              <a:t>        thisViewId === NavigationTable.idNormalSample2a</a:t>
+                <a:latin typeface="Calibri" pitchFamily="34" charset="0"/>
+                <a:ea typeface="Calibri" pitchFamily="34" charset="-122"/>
+                <a:cs typeface="Calibri" pitchFamily="34" charset="-120"/>
+              </a:rPr>
+              <a:t>        thisViewId === ViewId.ViewId.NormalSample2a</a:t>
             </a:r>
             <a:endParaRPr lang="en-US" sz="1000" dirty="0"/>
           </a:p>
           <a:p>
-            <a:pPr marL="0" indent="0">
+            <a:pPr indent="0" marL="0">
               <a:buNone/>
             </a:pPr>
             <a:r>
@@ -14915,16 +15367,16 @@
                 <a:solidFill>
                   <a:srgbClr val="CADCFC"/>
                 </a:solidFill>
-                <a:latin typeface="Consolas" pitchFamily="34" charset="0"/>
-                <a:ea typeface="Consolas" pitchFamily="34" charset="-122"/>
-                <a:cs typeface="Consolas" pitchFamily="34" charset="-120"/>
+                <a:latin typeface="Calibri" pitchFamily="34" charset="0"/>
+                <a:ea typeface="Calibri" pitchFamily="34" charset="-122"/>
+                <a:cs typeface="Calibri" pitchFamily="34" charset="-120"/>
               </a:rPr>
               <a:t>    readonly property bool isVariantB:</a:t>
             </a:r>
             <a:endParaRPr lang="en-US" sz="1000" dirty="0"/>
           </a:p>
           <a:p>
-            <a:pPr marL="0" indent="0">
+            <a:pPr indent="0" marL="0">
               <a:buNone/>
             </a:pPr>
             <a:r>
@@ -14932,22 +15384,22 @@
                 <a:solidFill>
                   <a:srgbClr val="CADCFC"/>
                 </a:solidFill>
-                <a:latin typeface="Consolas" pitchFamily="34" charset="0"/>
-                <a:ea typeface="Consolas" pitchFamily="34" charset="-122"/>
-                <a:cs typeface="Consolas" pitchFamily="34" charset="-120"/>
-              </a:rPr>
-              <a:t>        thisViewId === NavigationTable.idNormalSample2b</a:t>
+                <a:latin typeface="Calibri" pitchFamily="34" charset="0"/>
+                <a:ea typeface="Calibri" pitchFamily="34" charset="-122"/>
+                <a:cs typeface="Calibri" pitchFamily="34" charset="-120"/>
+              </a:rPr>
+              <a:t>        thisViewId === ViewId.ViewId.NormalSample2b</a:t>
             </a:r>
             <a:endParaRPr lang="en-US" sz="1000" dirty="0"/>
           </a:p>
           <a:p>
-            <a:pPr marL="0" indent="0">
+            <a:pPr indent="0" marL="0">
               <a:buNone/>
             </a:pPr>
             <a:endParaRPr lang="en-US" sz="1000" dirty="0"/>
           </a:p>
           <a:p>
-            <a:pPr marL="0" indent="0">
+            <a:pPr indent="0" marL="0">
               <a:buNone/>
             </a:pPr>
             <a:r>
@@ -14955,16 +15407,16 @@
                 <a:solidFill>
                   <a:srgbClr val="CADCFC"/>
                 </a:solidFill>
-                <a:latin typeface="Consolas" pitchFamily="34" charset="0"/>
-                <a:ea typeface="Consolas" pitchFamily="34" charset="-122"/>
-                <a:cs typeface="Consolas" pitchFamily="34" charset="-120"/>
+                <a:latin typeface="Calibri" pitchFamily="34" charset="0"/>
+                <a:ea typeface="Calibri" pitchFamily="34" charset="-122"/>
+                <a:cs typeface="Calibri" pitchFamily="34" charset="-120"/>
               </a:rPr>
               <a:t>    displayName: isVariantA ? "SAMPLE 2A"</a:t>
             </a:r>
             <a:endParaRPr lang="en-US" sz="1000" dirty="0"/>
           </a:p>
           <a:p>
-            <a:pPr marL="0" indent="0">
+            <a:pPr indent="0" marL="0">
               <a:buNone/>
             </a:pPr>
             <a:r>
@@ -14972,16 +15424,16 @@
                 <a:solidFill>
                   <a:srgbClr val="CADCFC"/>
                 </a:solidFill>
-                <a:latin typeface="Consolas" pitchFamily="34" charset="0"/>
-                <a:ea typeface="Consolas" pitchFamily="34" charset="-122"/>
-                <a:cs typeface="Consolas" pitchFamily="34" charset="-120"/>
+                <a:latin typeface="Calibri" pitchFamily="34" charset="0"/>
+                <a:ea typeface="Calibri" pitchFamily="34" charset="-122"/>
+                <a:cs typeface="Calibri" pitchFamily="34" charset="-120"/>
               </a:rPr>
               <a:t>                            : "SAMPLE 2B"</a:t>
             </a:r>
             <a:endParaRPr lang="en-US" sz="1000" dirty="0"/>
           </a:p>
           <a:p>
-            <a:pPr marL="0" indent="0">
+            <a:pPr indent="0" marL="0">
               <a:buNone/>
             </a:pPr>
             <a:r>
@@ -14989,16 +15441,16 @@
                 <a:solidFill>
                   <a:srgbClr val="CADCFC"/>
                 </a:solidFill>
-                <a:latin typeface="Consolas" pitchFamily="34" charset="0"/>
-                <a:ea typeface="Consolas" pitchFamily="34" charset="-122"/>
-                <a:cs typeface="Consolas" pitchFamily="34" charset="-120"/>
+                <a:latin typeface="Calibri" pitchFamily="34" charset="0"/>
+                <a:ea typeface="Calibri" pitchFamily="34" charset="-122"/>
+                <a:cs typeface="Calibri" pitchFamily="34" charset="-120"/>
               </a:rPr>
               <a:t>    backgroundColor: isVariantA ? "#6a1b9a"</a:t>
             </a:r>
             <a:endParaRPr lang="en-US" sz="1000" dirty="0"/>
           </a:p>
           <a:p>
-            <a:pPr marL="0" indent="0">
+            <a:pPr indent="0" marL="0">
               <a:buNone/>
             </a:pPr>
             <a:r>
@@ -15006,22 +15458,22 @@
                 <a:solidFill>
                   <a:srgbClr val="CADCFC"/>
                 </a:solidFill>
-                <a:latin typeface="Consolas" pitchFamily="34" charset="0"/>
-                <a:ea typeface="Consolas" pitchFamily="34" charset="-122"/>
-                <a:cs typeface="Consolas" pitchFamily="34" charset="-120"/>
+                <a:latin typeface="Calibri" pitchFamily="34" charset="0"/>
+                <a:ea typeface="Calibri" pitchFamily="34" charset="-122"/>
+                <a:cs typeface="Calibri" pitchFamily="34" charset="-120"/>
               </a:rPr>
               <a:t>                                : "#283593"</a:t>
             </a:r>
             <a:endParaRPr lang="en-US" sz="1000" dirty="0"/>
           </a:p>
           <a:p>
-            <a:pPr marL="0" indent="0">
+            <a:pPr indent="0" marL="0">
               <a:buNone/>
             </a:pPr>
             <a:endParaRPr lang="en-US" sz="1000" dirty="0"/>
           </a:p>
           <a:p>
-            <a:pPr marL="0" indent="0">
+            <a:pPr indent="0" marL="0">
               <a:buNone/>
             </a:pPr>
             <a:r>
@@ -15029,16 +15481,16 @@
                 <a:solidFill>
                   <a:srgbClr val="CADCFC"/>
                 </a:solidFill>
-                <a:latin typeface="Consolas" pitchFamily="34" charset="0"/>
-                <a:ea typeface="Consolas" pitchFamily="34" charset="-122"/>
-                <a:cs typeface="Consolas" pitchFamily="34" charset="-120"/>
+                <a:latin typeface="Calibri" pitchFamily="34" charset="0"/>
+                <a:ea typeface="Calibri" pitchFamily="34" charset="-122"/>
+                <a:cs typeface="Calibri" pitchFamily="34" charset="-120"/>
               </a:rPr>
               <a:t>    function onViewKey(vk, ve) {</a:t>
             </a:r>
             <a:endParaRPr lang="en-US" sz="1000" dirty="0"/>
           </a:p>
           <a:p>
-            <a:pPr marL="0" indent="0">
+            <a:pPr indent="0" marL="0">
               <a:buNone/>
             </a:pPr>
             <a:r>
@@ -15046,16 +15498,16 @@
                 <a:solidFill>
                   <a:srgbClr val="CADCFC"/>
                 </a:solidFill>
-                <a:latin typeface="Consolas" pitchFamily="34" charset="0"/>
-                <a:ea typeface="Consolas" pitchFamily="34" charset="-122"/>
-                <a:cs typeface="Consolas" pitchFamily="34" charset="-120"/>
-              </a:rPr>
-              <a:t>        if (ve !== KeyDispatcher.evClick) return</a:t>
+                <a:latin typeface="Calibri" pitchFamily="34" charset="0"/>
+                <a:ea typeface="Calibri" pitchFamily="34" charset="-122"/>
+                <a:cs typeface="Calibri" pitchFamily="34" charset="-120"/>
+              </a:rPr>
+              <a:t>        if (ve !== Event.Event.Click) return</a:t>
             </a:r>
             <a:endParaRPr lang="en-US" sz="1000" dirty="0"/>
           </a:p>
           <a:p>
-            <a:pPr marL="0" indent="0">
+            <a:pPr indent="0" marL="0">
               <a:buNone/>
             </a:pPr>
             <a:r>
@@ -15063,16 +15515,16 @@
                 <a:solidFill>
                   <a:srgbClr val="CADCFC"/>
                 </a:solidFill>
-                <a:latin typeface="Consolas" pitchFamily="34" charset="0"/>
-                <a:ea typeface="Consolas" pitchFamily="34" charset="-122"/>
-                <a:cs typeface="Consolas" pitchFamily="34" charset="-120"/>
-              </a:rPr>
-              <a:t>        if (vk === KeyDispatcher.keyBack) {</a:t>
+                <a:latin typeface="Calibri" pitchFamily="34" charset="0"/>
+                <a:ea typeface="Calibri" pitchFamily="34" charset="-122"/>
+                <a:cs typeface="Calibri" pitchFamily="34" charset="-120"/>
+              </a:rPr>
+              <a:t>        if (vk === Key.Key.Back) {</a:t>
             </a:r>
             <a:endParaRPr lang="en-US" sz="1000" dirty="0"/>
           </a:p>
           <a:p>
-            <a:pPr marL="0" indent="0">
+            <a:pPr indent="0" marL="0">
               <a:buNone/>
             </a:pPr>
             <a:r>
@@ -15080,16 +15532,16 @@
                 <a:solidFill>
                   <a:srgbClr val="CADCFC"/>
                 </a:solidFill>
-                <a:latin typeface="Consolas" pitchFamily="34" charset="0"/>
-                <a:ea typeface="Consolas" pitchFamily="34" charset="-122"/>
-                <a:cs typeface="Consolas" pitchFamily="34" charset="-120"/>
+                <a:latin typeface="Calibri" pitchFamily="34" charset="0"/>
+                <a:ea typeface="Calibri" pitchFamily="34" charset="-122"/>
+                <a:cs typeface="Calibri" pitchFamily="34" charset="-120"/>
               </a:rPr>
               <a:t>            Mediator.requestNavigate(</a:t>
             </a:r>
             <a:endParaRPr lang="en-US" sz="1000" dirty="0"/>
           </a:p>
           <a:p>
-            <a:pPr marL="0" indent="0">
+            <a:pPr indent="0" marL="0">
               <a:buNone/>
             </a:pPr>
             <a:r>
@@ -15097,16 +15549,16 @@
                 <a:solidFill>
                   <a:srgbClr val="CADCFC"/>
                 </a:solidFill>
-                <a:latin typeface="Consolas" pitchFamily="34" charset="0"/>
-                <a:ea typeface="Consolas" pitchFamily="34" charset="-122"/>
-                <a:cs typeface="Consolas" pitchFamily="34" charset="-120"/>
-              </a:rPr>
-              <a:t>                NavigationTable.idNormalMenu,</a:t>
+                <a:latin typeface="Calibri" pitchFamily="34" charset="0"/>
+                <a:ea typeface="Calibri" pitchFamily="34" charset="-122"/>
+                <a:cs typeface="Calibri" pitchFamily="34" charset="-120"/>
+              </a:rPr>
+              <a:t>                ViewId.ViewId.NormalMenu,</a:t>
             </a:r>
             <a:endParaRPr lang="en-US" sz="1000" dirty="0"/>
           </a:p>
           <a:p>
-            <a:pPr marL="0" indent="0">
+            <a:pPr indent="0" marL="0">
               <a:buNone/>
             </a:pPr>
             <a:r>
@@ -15114,16 +15566,16 @@
                 <a:solidFill>
                   <a:srgbClr val="CADCFC"/>
                 </a:solidFill>
-                <a:latin typeface="Consolas" pitchFamily="34" charset="0"/>
-                <a:ea typeface="Consolas" pitchFamily="34" charset="-122"/>
-                <a:cs typeface="Consolas" pitchFamily="34" charset="-120"/>
-              </a:rPr>
-              <a:t>                TransitionManager.directionBack)</a:t>
+                <a:latin typeface="Calibri" pitchFamily="34" charset="0"/>
+                <a:ea typeface="Calibri" pitchFamily="34" charset="-122"/>
+                <a:cs typeface="Calibri" pitchFamily="34" charset="-120"/>
+              </a:rPr>
+              <a:t>                Direction.Direction.Back)</a:t>
             </a:r>
             <a:endParaRPr lang="en-US" sz="1000" dirty="0"/>
           </a:p>
           <a:p>
-            <a:pPr marL="0" indent="0">
+            <a:pPr indent="0" marL="0">
               <a:buNone/>
             </a:pPr>
             <a:r>
@@ -15131,16 +15583,16 @@
                 <a:solidFill>
                   <a:srgbClr val="CADCFC"/>
                 </a:solidFill>
-                <a:latin typeface="Consolas" pitchFamily="34" charset="0"/>
-                <a:ea typeface="Consolas" pitchFamily="34" charset="-122"/>
-                <a:cs typeface="Consolas" pitchFamily="34" charset="-120"/>
+                <a:latin typeface="Calibri" pitchFamily="34" charset="0"/>
+                <a:ea typeface="Calibri" pitchFamily="34" charset="-122"/>
+                <a:cs typeface="Calibri" pitchFamily="34" charset="-120"/>
               </a:rPr>
               <a:t>        }</a:t>
             </a:r>
             <a:endParaRPr lang="en-US" sz="1000" dirty="0"/>
           </a:p>
           <a:p>
-            <a:pPr marL="0" indent="0">
+            <a:pPr indent="0" marL="0">
               <a:buNone/>
             </a:pPr>
             <a:r>
@@ -15148,16 +15600,16 @@
                 <a:solidFill>
                   <a:srgbClr val="CADCFC"/>
                 </a:solidFill>
-                <a:latin typeface="Consolas" pitchFamily="34" charset="0"/>
-                <a:ea typeface="Consolas" pitchFamily="34" charset="-122"/>
-                <a:cs typeface="Consolas" pitchFamily="34" charset="-120"/>
+                <a:latin typeface="Calibri" pitchFamily="34" charset="0"/>
+                <a:ea typeface="Calibri" pitchFamily="34" charset="-122"/>
+                <a:cs typeface="Calibri" pitchFamily="34" charset="-120"/>
               </a:rPr>
               <a:t>    }</a:t>
             </a:r>
             <a:endParaRPr lang="en-US" sz="1000" dirty="0"/>
           </a:p>
           <a:p>
-            <a:pPr marL="0" indent="0">
+            <a:pPr indent="0" marL="0">
               <a:buNone/>
             </a:pPr>
             <a:r>
@@ -15165,9 +15617,9 @@
                 <a:solidFill>
                   <a:srgbClr val="CADCFC"/>
                 </a:solidFill>
-                <a:latin typeface="Consolas" pitchFamily="34" charset="0"/>
-                <a:ea typeface="Consolas" pitchFamily="34" charset="-122"/>
-                <a:cs typeface="Consolas" pitchFamily="34" charset="-120"/>
+                <a:latin typeface="Calibri" pitchFamily="34" charset="0"/>
+                <a:ea typeface="Calibri" pitchFamily="34" charset="-122"/>
+                <a:cs typeface="Calibri" pitchFamily="34" charset="-120"/>
               </a:rPr>
               <a:t>}</a:t>
             </a:r>
@@ -15196,7 +15648,7 @@
           <a:bodyPr wrap="square" lIns="0" tIns="0" rIns="0" bIns="0" rtlCol="0" anchor="ctr"/>
           <a:lstStyle/>
           <a:p>
-            <a:pPr marL="0" indent="0">
+            <a:pPr indent="0" marL="0">
               <a:buNone/>
             </a:pPr>
             <a:r>
@@ -15235,7 +15687,7 @@
           <a:bodyPr wrap="square" lIns="0" tIns="0" rIns="0" bIns="0" rtlCol="0" anchor="ctr"/>
           <a:lstStyle/>
           <a:p>
-            <a:pPr marL="0" indent="0" algn="r">
+            <a:pPr algn="r" indent="0" marL="0">
               <a:buNone/>
             </a:pPr>
             <a:r>
@@ -15554,299 +16006,4 @@
     </a:ext>
   </a:extLst>
 </a:theme>
-</file>
-
-<file path=ppt/theme/theme2.xml><?xml version="1.0" encoding="utf-8"?>
-<a:theme xmlns:a="http://schemas.openxmlformats.org/drawingml/2006/main" name="Office テーマ">
-  <a:themeElements>
-    <a:clrScheme name="Office">
-      <a:dk1>
-        <a:sysClr val="windowText" lastClr="000000"/>
-      </a:dk1>
-      <a:lt1>
-        <a:sysClr val="window" lastClr="FFFFFF"/>
-      </a:lt1>
-      <a:dk2>
-        <a:srgbClr val="44546A"/>
-      </a:dk2>
-      <a:lt2>
-        <a:srgbClr val="E7E6E6"/>
-      </a:lt2>
-      <a:accent1>
-        <a:srgbClr val="4472C4"/>
-      </a:accent1>
-      <a:accent2>
-        <a:srgbClr val="ED7D31"/>
-      </a:accent2>
-      <a:accent3>
-        <a:srgbClr val="A5A5A5"/>
-      </a:accent3>
-      <a:accent4>
-        <a:srgbClr val="FFC000"/>
-      </a:accent4>
-      <a:accent5>
-        <a:srgbClr val="5B9BD5"/>
-      </a:accent5>
-      <a:accent6>
-        <a:srgbClr val="70AD47"/>
-      </a:accent6>
-      <a:hlink>
-        <a:srgbClr val="0563C1"/>
-      </a:hlink>
-      <a:folHlink>
-        <a:srgbClr val="954F72"/>
-      </a:folHlink>
-    </a:clrScheme>
-    <a:fontScheme name="Office">
-      <a:majorFont>
-        <a:latin typeface="游ゴシック Light" panose="020F0302020204030204"/>
-        <a:ea typeface=""/>
-        <a:cs typeface=""/>
-        <a:font script="Jpan" typeface="游ゴシック Light"/>
-        <a:font script="Hang" typeface="맑은 고딕"/>
-        <a:font script="Hans" typeface="等线 Light"/>
-        <a:font script="Hant" typeface="新細明體"/>
-        <a:font script="Arab" typeface="Times New Roman"/>
-        <a:font script="Hebr" typeface="Times New Roman"/>
-        <a:font script="Thai" typeface="Angsana New"/>
-        <a:font script="Ethi" typeface="Nyala"/>
-        <a:font script="Beng" typeface="Vrinda"/>
-        <a:font script="Gujr" typeface="Shruti"/>
-        <a:font script="Khmr" typeface="MoolBoran"/>
-        <a:font script="Knda" typeface="Tunga"/>
-        <a:font script="Guru" typeface="Raavi"/>
-        <a:font script="Cans" typeface="Euphemia"/>
-        <a:font script="Cher" typeface="Plantagenet Cherokee"/>
-        <a:font script="Yiii" typeface="Microsoft Yi Baiti"/>
-        <a:font script="Tibt" typeface="Microsoft Himalaya"/>
-        <a:font script="Thaa" typeface="MV Boli"/>
-        <a:font script="Deva" typeface="Mangal"/>
-        <a:font script="Telu" typeface="Gautami"/>
-        <a:font script="Taml" typeface="Latha"/>
-        <a:font script="Syrc" typeface="Estrangelo Edessa"/>
-        <a:font script="Orya" typeface="Kalinga"/>
-        <a:font script="Mlym" typeface="Kartika"/>
-        <a:font script="Laoo" typeface="DokChampa"/>
-        <a:font script="Sinh" typeface="Iskoola Pota"/>
-        <a:font script="Mong" typeface="Mongolian Baiti"/>
-        <a:font script="Viet" typeface="Times New Roman"/>
-        <a:font script="Uigh" typeface="Microsoft Uighur"/>
-        <a:font script="Geor" typeface="Sylfaen"/>
-        <a:font script="Armn" typeface="Arial"/>
-        <a:font script="Bugi" typeface="Leelawadee UI"/>
-        <a:font script="Bopo" typeface="Microsoft JhengHei"/>
-        <a:font script="Java" typeface="Javanese Text"/>
-        <a:font script="Lisu" typeface="Segoe UI"/>
-        <a:font script="Mymr" typeface="Myanmar Text"/>
-        <a:font script="Nkoo" typeface="Ebrima"/>
-        <a:font script="Olck" typeface="Nirmala UI"/>
-        <a:font script="Osma" typeface="Ebrima"/>
-        <a:font script="Phag" typeface="Phagspa"/>
-        <a:font script="Syrn" typeface="Estrangelo Edessa"/>
-        <a:font script="Syrj" typeface="Estrangelo Edessa"/>
-        <a:font script="Syre" typeface="Estrangelo Edessa"/>
-        <a:font script="Sora" typeface="Nirmala UI"/>
-        <a:font script="Tale" typeface="Microsoft Tai Le"/>
-        <a:font script="Talu" typeface="Microsoft New Tai Lue"/>
-        <a:font script="Tfng" typeface="Ebrima"/>
-      </a:majorFont>
-      <a:minorFont>
-        <a:latin typeface="游ゴシック" panose="020F0502020204030204"/>
-        <a:ea typeface=""/>
-        <a:cs typeface=""/>
-        <a:font script="Jpan" typeface="游ゴシック"/>
-        <a:font script="Hang" typeface="맑은 고딕"/>
-        <a:font script="Hans" typeface="等线"/>
-        <a:font script="Hant" typeface="新細明體"/>
-        <a:font script="Arab" typeface="Arial"/>
-        <a:font script="Hebr" typeface="Arial"/>
-        <a:font script="Thai" typeface="Cordia New"/>
-        <a:font script="Ethi" typeface="Nyala"/>
-        <a:font script="Beng" typeface="Vrinda"/>
-        <a:font script="Gujr" typeface="Shruti"/>
-        <a:font script="Khmr" typeface="DaunPenh"/>
-        <a:font script="Knda" typeface="Tunga"/>
-        <a:font script="Guru" typeface="Raavi"/>
-        <a:font script="Cans" typeface="Euphemia"/>
-        <a:font script="Cher" typeface="Plantagenet Cherokee"/>
-        <a:font script="Yiii" typeface="Microsoft Yi Baiti"/>
-        <a:font script="Tibt" typeface="Microsoft Himalaya"/>
-        <a:font script="Thaa" typeface="MV Boli"/>
-        <a:font script="Deva" typeface="Mangal"/>
-        <a:font script="Telu" typeface="Gautami"/>
-        <a:font script="Taml" typeface="Latha"/>
-        <a:font script="Syrc" typeface="Estrangelo Edessa"/>
-        <a:font script="Orya" typeface="Kalinga"/>
-        <a:font script="Mlym" typeface="Kartika"/>
-        <a:font script="Laoo" typeface="DokChampa"/>
-        <a:font script="Sinh" typeface="Iskoola Pota"/>
-        <a:font script="Mong" typeface="Mongolian Baiti"/>
-        <a:font script="Viet" typeface="Arial"/>
-        <a:font script="Uigh" typeface="Microsoft Uighur"/>
-        <a:font script="Geor" typeface="Sylfaen"/>
-        <a:font script="Armn" typeface="Arial"/>
-        <a:font script="Bugi" typeface="Leelawadee UI"/>
-        <a:font script="Bopo" typeface="Microsoft JhengHei"/>
-        <a:font script="Java" typeface="Javanese Text"/>
-        <a:font script="Lisu" typeface="Segoe UI"/>
-        <a:font script="Mymr" typeface="Myanmar Text"/>
-        <a:font script="Nkoo" typeface="Ebrima"/>
-        <a:font script="Olck" typeface="Nirmala UI"/>
-        <a:font script="Osma" typeface="Ebrima"/>
-        <a:font script="Phag" typeface="Phagspa"/>
-        <a:font script="Syrn" typeface="Estrangelo Edessa"/>
-        <a:font script="Syrj" typeface="Estrangelo Edessa"/>
-        <a:font script="Syre" typeface="Estrangelo Edessa"/>
-        <a:font script="Sora" typeface="Nirmala UI"/>
-        <a:font script="Tale" typeface="Microsoft Tai Le"/>
-        <a:font script="Talu" typeface="Microsoft New Tai Lue"/>
-        <a:font script="Tfng" typeface="Ebrima"/>
-      </a:minorFont>
-    </a:fontScheme>
-    <a:fmtScheme name="Office">
-      <a:fillStyleLst>
-        <a:solidFill>
-          <a:schemeClr val="phClr"/>
-        </a:solidFill>
-        <a:gradFill rotWithShape="1">
-          <a:gsLst>
-            <a:gs pos="0">
-              <a:schemeClr val="phClr">
-                <a:lumMod val="110000"/>
-                <a:satMod val="105000"/>
-                <a:tint val="67000"/>
-              </a:schemeClr>
-            </a:gs>
-            <a:gs pos="50000">
-              <a:schemeClr val="phClr">
-                <a:lumMod val="105000"/>
-                <a:satMod val="103000"/>
-                <a:tint val="73000"/>
-              </a:schemeClr>
-            </a:gs>
-            <a:gs pos="100000">
-              <a:schemeClr val="phClr">
-                <a:lumMod val="105000"/>
-                <a:satMod val="109000"/>
-                <a:tint val="81000"/>
-              </a:schemeClr>
-            </a:gs>
-          </a:gsLst>
-          <a:lin ang="5400000" scaled="0"/>
-        </a:gradFill>
-        <a:gradFill rotWithShape="1">
-          <a:gsLst>
-            <a:gs pos="0">
-              <a:schemeClr val="phClr">
-                <a:satMod val="103000"/>
-                <a:lumMod val="102000"/>
-                <a:tint val="94000"/>
-              </a:schemeClr>
-            </a:gs>
-            <a:gs pos="50000">
-              <a:schemeClr val="phClr">
-                <a:satMod val="110000"/>
-                <a:lumMod val="100000"/>
-                <a:shade val="100000"/>
-              </a:schemeClr>
-            </a:gs>
-            <a:gs pos="100000">
-              <a:schemeClr val="phClr">
-                <a:lumMod val="99000"/>
-                <a:satMod val="120000"/>
-                <a:shade val="78000"/>
-              </a:schemeClr>
-            </a:gs>
-          </a:gsLst>
-          <a:lin ang="5400000" scaled="0"/>
-        </a:gradFill>
-      </a:fillStyleLst>
-      <a:lnStyleLst>
-        <a:ln w="6350" cap="flat" cmpd="sng" algn="ctr">
-          <a:solidFill>
-            <a:schemeClr val="phClr"/>
-          </a:solidFill>
-          <a:prstDash val="solid"/>
-          <a:miter lim="800000"/>
-        </a:ln>
-        <a:ln w="12700" cap="flat" cmpd="sng" algn="ctr">
-          <a:solidFill>
-            <a:schemeClr val="phClr"/>
-          </a:solidFill>
-          <a:prstDash val="solid"/>
-          <a:miter lim="800000"/>
-        </a:ln>
-        <a:ln w="19050" cap="flat" cmpd="sng" algn="ctr">
-          <a:solidFill>
-            <a:schemeClr val="phClr"/>
-          </a:solidFill>
-          <a:prstDash val="solid"/>
-          <a:miter lim="800000"/>
-        </a:ln>
-      </a:lnStyleLst>
-      <a:effectStyleLst>
-        <a:effectStyle>
-          <a:effectLst/>
-        </a:effectStyle>
-        <a:effectStyle>
-          <a:effectLst/>
-        </a:effectStyle>
-        <a:effectStyle>
-          <a:effectLst>
-            <a:outerShdw blurRad="57150" dist="19050" dir="5400000" algn="ctr" rotWithShape="0">
-              <a:srgbClr val="000000">
-                <a:alpha val="63000"/>
-              </a:srgbClr>
-            </a:outerShdw>
-          </a:effectLst>
-        </a:effectStyle>
-      </a:effectStyleLst>
-      <a:bgFillStyleLst>
-        <a:solidFill>
-          <a:schemeClr val="phClr"/>
-        </a:solidFill>
-        <a:solidFill>
-          <a:schemeClr val="phClr">
-            <a:tint val="95000"/>
-            <a:satMod val="170000"/>
-          </a:schemeClr>
-        </a:solidFill>
-        <a:gradFill rotWithShape="1">
-          <a:gsLst>
-            <a:gs pos="0">
-              <a:schemeClr val="phClr">
-                <a:tint val="93000"/>
-                <a:satMod val="150000"/>
-                <a:shade val="98000"/>
-                <a:lumMod val="102000"/>
-              </a:schemeClr>
-            </a:gs>
-            <a:gs pos="50000">
-              <a:schemeClr val="phClr">
-                <a:tint val="98000"/>
-                <a:satMod val="130000"/>
-                <a:shade val="90000"/>
-                <a:lumMod val="103000"/>
-              </a:schemeClr>
-            </a:gs>
-            <a:gs pos="100000">
-              <a:schemeClr val="phClr">
-                <a:shade val="63000"/>
-                <a:satMod val="120000"/>
-              </a:schemeClr>
-            </a:gs>
-          </a:gsLst>
-          <a:lin ang="5400000" scaled="0"/>
-        </a:gradFill>
-      </a:bgFillStyleLst>
-    </a:fmtScheme>
-  </a:themeElements>
-  <a:objectDefaults/>
-  <a:extraClrSchemeLst/>
-  <a:extLst>
-    <a:ext uri="{05A4C25C-085E-4340-85A3-A5531E510DB2}">
-      <thm15:themeFamily xmlns:thm15="http://schemas.microsoft.com/office/thememl/2012/main" name="Office Theme" id="{62F939B6-93AF-4DB8-9C6B-D6C7DFDC589F}" vid="{4A3C46E8-61CC-4603-A589-7422A47A8E4A}"/>
-    </a:ext>
-  </a:extLst>
-</a:theme>
 </file>